--- a/CDU_Python_Beginner_Workshop_Section1.pptx
+++ b/CDU_Python_Beginner_Workshop_Section1.pptx
@@ -152,7 +152,7 @@
   <pc:docChgLst>
     <pc:chgData name="Dang Khoa Pham" userId="a0828928-506b-41e7-91fe-334565ca4eb5" providerId="ADAL" clId="{07F4103E-4D85-4DDD-92DF-5DC143FDFFF6}"/>
     <pc:docChg chg="undo custSel modSld modShowInfo">
-      <pc:chgData name="Dang Khoa Pham" userId="a0828928-506b-41e7-91fe-334565ca4eb5" providerId="ADAL" clId="{07F4103E-4D85-4DDD-92DF-5DC143FDFFF6}" dt="2026-07-26T01:34:14.529" v="219" actId="2744"/>
+      <pc:chgData name="Dang Khoa Pham" userId="a0828928-506b-41e7-91fe-334565ca4eb5" providerId="ADAL" clId="{07F4103E-4D85-4DDD-92DF-5DC143FDFFF6}" dt="2026-07-26T11:32:11.061" v="250" actId="20577"/>
       <pc:docMkLst>
         <pc:docMk/>
       </pc:docMkLst>
@@ -188,22 +188,252 @@
         </pc:picChg>
       </pc:sldChg>
       <pc:sldChg chg="modSp mod">
-        <pc:chgData name="Dang Khoa Pham" userId="a0828928-506b-41e7-91fe-334565ca4eb5" providerId="ADAL" clId="{07F4103E-4D85-4DDD-92DF-5DC143FDFFF6}" dt="2026-07-25T14:14:25.330" v="20" actId="20577"/>
+        <pc:chgData name="Dang Khoa Pham" userId="a0828928-506b-41e7-91fe-334565ca4eb5" providerId="ADAL" clId="{07F4103E-4D85-4DDD-92DF-5DC143FDFFF6}" dt="2026-07-26T11:27:41.788" v="221" actId="1076"/>
+        <pc:sldMkLst>
+          <pc:docMk/>
+          <pc:sldMk cId="0" sldId="257"/>
+        </pc:sldMkLst>
+        <pc:spChg chg="mod">
+          <ac:chgData name="Dang Khoa Pham" userId="a0828928-506b-41e7-91fe-334565ca4eb5" providerId="ADAL" clId="{07F4103E-4D85-4DDD-92DF-5DC143FDFFF6}" dt="2026-07-26T11:27:38.568" v="220" actId="1076"/>
+          <ac:spMkLst>
+            <pc:docMk/>
+            <pc:sldMk cId="0" sldId="257"/>
+            <ac:spMk id="35" creationId="{00000000-0000-0000-0000-000000000000}"/>
+          </ac:spMkLst>
+        </pc:spChg>
+        <pc:spChg chg="mod">
+          <ac:chgData name="Dang Khoa Pham" userId="a0828928-506b-41e7-91fe-334565ca4eb5" providerId="ADAL" clId="{07F4103E-4D85-4DDD-92DF-5DC143FDFFF6}" dt="2026-07-26T11:27:41.788" v="221" actId="1076"/>
+          <ac:spMkLst>
+            <pc:docMk/>
+            <pc:sldMk cId="0" sldId="257"/>
+            <ac:spMk id="38" creationId="{00000000-0000-0000-0000-000000000000}"/>
+          </ac:spMkLst>
+        </pc:spChg>
+      </pc:sldChg>
+      <pc:sldChg chg="modSp mod">
+        <pc:chgData name="Dang Khoa Pham" userId="a0828928-506b-41e7-91fe-334565ca4eb5" providerId="ADAL" clId="{07F4103E-4D85-4DDD-92DF-5DC143FDFFF6}" dt="2026-07-26T11:32:11.061" v="250" actId="20577"/>
+        <pc:sldMkLst>
+          <pc:docMk/>
+          <pc:sldMk cId="0" sldId="258"/>
+        </pc:sldMkLst>
+        <pc:spChg chg="mod">
+          <ac:chgData name="Dang Khoa Pham" userId="a0828928-506b-41e7-91fe-334565ca4eb5" providerId="ADAL" clId="{07F4103E-4D85-4DDD-92DF-5DC143FDFFF6}" dt="2026-07-26T11:32:07.256" v="249" actId="20577"/>
+          <ac:spMkLst>
+            <pc:docMk/>
+            <pc:sldMk cId="0" sldId="258"/>
+            <ac:spMk id="6" creationId="{00000000-0000-0000-0000-000000000000}"/>
+          </ac:spMkLst>
+        </pc:spChg>
+        <pc:spChg chg="mod">
+          <ac:chgData name="Dang Khoa Pham" userId="a0828928-506b-41e7-91fe-334565ca4eb5" providerId="ADAL" clId="{07F4103E-4D85-4DDD-92DF-5DC143FDFFF6}" dt="2026-07-26T11:32:11.061" v="250" actId="20577"/>
+          <ac:spMkLst>
+            <pc:docMk/>
+            <pc:sldMk cId="0" sldId="258"/>
+            <ac:spMk id="10" creationId="{00000000-0000-0000-0000-000000000000}"/>
+          </ac:spMkLst>
+        </pc:spChg>
+      </pc:sldChg>
+      <pc:sldChg chg="delSp modSp mod">
+        <pc:chgData name="Dang Khoa Pham" userId="a0828928-506b-41e7-91fe-334565ca4eb5" providerId="ADAL" clId="{07F4103E-4D85-4DDD-92DF-5DC143FDFFF6}" dt="2026-07-26T11:30:52.497" v="246" actId="14100"/>
         <pc:sldMkLst>
           <pc:docMk/>
           <pc:sldMk cId="0" sldId="259"/>
         </pc:sldMkLst>
         <pc:spChg chg="mod">
-          <ac:chgData name="Dang Khoa Pham" userId="a0828928-506b-41e7-91fe-334565ca4eb5" providerId="ADAL" clId="{07F4103E-4D85-4DDD-92DF-5DC143FDFFF6}" dt="2026-07-25T14:14:25.330" v="20" actId="20577"/>
+          <ac:chgData name="Dang Khoa Pham" userId="a0828928-506b-41e7-91fe-334565ca4eb5" providerId="ADAL" clId="{07F4103E-4D85-4DDD-92DF-5DC143FDFFF6}" dt="2026-07-26T11:29:33.937" v="235" actId="14100"/>
+          <ac:spMkLst>
+            <pc:docMk/>
+            <pc:sldMk cId="0" sldId="259"/>
+            <ac:spMk id="4" creationId="{00000000-0000-0000-0000-000000000000}"/>
+          </ac:spMkLst>
+        </pc:spChg>
+        <pc:spChg chg="mod">
+          <ac:chgData name="Dang Khoa Pham" userId="a0828928-506b-41e7-91fe-334565ca4eb5" providerId="ADAL" clId="{07F4103E-4D85-4DDD-92DF-5DC143FDFFF6}" dt="2026-07-26T11:29:48.076" v="237" actId="14100"/>
+          <ac:spMkLst>
+            <pc:docMk/>
+            <pc:sldMk cId="0" sldId="259"/>
+            <ac:spMk id="7" creationId="{00000000-0000-0000-0000-000000000000}"/>
+          </ac:spMkLst>
+        </pc:spChg>
+        <pc:spChg chg="mod">
+          <ac:chgData name="Dang Khoa Pham" userId="a0828928-506b-41e7-91fe-334565ca4eb5" providerId="ADAL" clId="{07F4103E-4D85-4DDD-92DF-5DC143FDFFF6}" dt="2026-07-26T11:29:33.937" v="235" actId="14100"/>
+          <ac:spMkLst>
+            <pc:docMk/>
+            <pc:sldMk cId="0" sldId="259"/>
+            <ac:spMk id="8" creationId="{00000000-0000-0000-0000-000000000000}"/>
+          </ac:spMkLst>
+        </pc:spChg>
+        <pc:spChg chg="mod">
+          <ac:chgData name="Dang Khoa Pham" userId="a0828928-506b-41e7-91fe-334565ca4eb5" providerId="ADAL" clId="{07F4103E-4D85-4DDD-92DF-5DC143FDFFF6}" dt="2026-07-26T11:29:48.076" v="237" actId="14100"/>
+          <ac:spMkLst>
+            <pc:docMk/>
+            <pc:sldMk cId="0" sldId="259"/>
+            <ac:spMk id="11" creationId="{00000000-0000-0000-0000-000000000000}"/>
+          </ac:spMkLst>
+        </pc:spChg>
+        <pc:spChg chg="mod">
+          <ac:chgData name="Dang Khoa Pham" userId="a0828928-506b-41e7-91fe-334565ca4eb5" providerId="ADAL" clId="{07F4103E-4D85-4DDD-92DF-5DC143FDFFF6}" dt="2026-07-26T11:29:33.937" v="235" actId="14100"/>
+          <ac:spMkLst>
+            <pc:docMk/>
+            <pc:sldMk cId="0" sldId="259"/>
+            <ac:spMk id="12" creationId="{00000000-0000-0000-0000-000000000000}"/>
+          </ac:spMkLst>
+        </pc:spChg>
+        <pc:spChg chg="mod">
+          <ac:chgData name="Dang Khoa Pham" userId="a0828928-506b-41e7-91fe-334565ca4eb5" providerId="ADAL" clId="{07F4103E-4D85-4DDD-92DF-5DC143FDFFF6}" dt="2026-07-26T11:29:48.076" v="237" actId="14100"/>
+          <ac:spMkLst>
+            <pc:docMk/>
+            <pc:sldMk cId="0" sldId="259"/>
+            <ac:spMk id="15" creationId="{00000000-0000-0000-0000-000000000000}"/>
+          </ac:spMkLst>
+        </pc:spChg>
+        <pc:spChg chg="mod">
+          <ac:chgData name="Dang Khoa Pham" userId="a0828928-506b-41e7-91fe-334565ca4eb5" providerId="ADAL" clId="{07F4103E-4D85-4DDD-92DF-5DC143FDFFF6}" dt="2026-07-26T11:29:33.937" v="235" actId="14100"/>
+          <ac:spMkLst>
+            <pc:docMk/>
+            <pc:sldMk cId="0" sldId="259"/>
+            <ac:spMk id="16" creationId="{00000000-0000-0000-0000-000000000000}"/>
+          </ac:spMkLst>
+        </pc:spChg>
+        <pc:spChg chg="mod">
+          <ac:chgData name="Dang Khoa Pham" userId="a0828928-506b-41e7-91fe-334565ca4eb5" providerId="ADAL" clId="{07F4103E-4D85-4DDD-92DF-5DC143FDFFF6}" dt="2026-07-26T11:29:48.076" v="237" actId="14100"/>
+          <ac:spMkLst>
+            <pc:docMk/>
+            <pc:sldMk cId="0" sldId="259"/>
+            <ac:spMk id="19" creationId="{00000000-0000-0000-0000-000000000000}"/>
+          </ac:spMkLst>
+        </pc:spChg>
+        <pc:spChg chg="mod">
+          <ac:chgData name="Dang Khoa Pham" userId="a0828928-506b-41e7-91fe-334565ca4eb5" providerId="ADAL" clId="{07F4103E-4D85-4DDD-92DF-5DC143FDFFF6}" dt="2026-07-26T11:30:11.344" v="238" actId="14100"/>
+          <ac:spMkLst>
+            <pc:docMk/>
+            <pc:sldMk cId="0" sldId="259"/>
+            <ac:spMk id="20" creationId="{00000000-0000-0000-0000-000000000000}"/>
+          </ac:spMkLst>
+        </pc:spChg>
+        <pc:spChg chg="mod">
+          <ac:chgData name="Dang Khoa Pham" userId="a0828928-506b-41e7-91fe-334565ca4eb5" providerId="ADAL" clId="{07F4103E-4D85-4DDD-92DF-5DC143FDFFF6}" dt="2026-07-26T11:29:21.624" v="234" actId="1076"/>
           <ac:spMkLst>
             <pc:docMk/>
             <pc:sldMk cId="0" sldId="259"/>
             <ac:spMk id="21" creationId="{00000000-0000-0000-0000-000000000000}"/>
           </ac:spMkLst>
         </pc:spChg>
+        <pc:spChg chg="mod">
+          <ac:chgData name="Dang Khoa Pham" userId="a0828928-506b-41e7-91fe-334565ca4eb5" providerId="ADAL" clId="{07F4103E-4D85-4DDD-92DF-5DC143FDFFF6}" dt="2026-07-26T11:30:41.573" v="244" actId="14100"/>
+          <ac:spMkLst>
+            <pc:docMk/>
+            <pc:sldMk cId="0" sldId="259"/>
+            <ac:spMk id="22" creationId="{00000000-0000-0000-0000-000000000000}"/>
+          </ac:spMkLst>
+        </pc:spChg>
+        <pc:spChg chg="mod">
+          <ac:chgData name="Dang Khoa Pham" userId="a0828928-506b-41e7-91fe-334565ca4eb5" providerId="ADAL" clId="{07F4103E-4D85-4DDD-92DF-5DC143FDFFF6}" dt="2026-07-26T11:30:37.263" v="243" actId="1076"/>
+          <ac:spMkLst>
+            <pc:docMk/>
+            <pc:sldMk cId="0" sldId="259"/>
+            <ac:spMk id="23" creationId="{00000000-0000-0000-0000-000000000000}"/>
+          </ac:spMkLst>
+        </pc:spChg>
+        <pc:spChg chg="mod">
+          <ac:chgData name="Dang Khoa Pham" userId="a0828928-506b-41e7-91fe-334565ca4eb5" providerId="ADAL" clId="{07F4103E-4D85-4DDD-92DF-5DC143FDFFF6}" dt="2026-07-26T11:30:11.344" v="238" actId="14100"/>
+          <ac:spMkLst>
+            <pc:docMk/>
+            <pc:sldMk cId="0" sldId="259"/>
+            <ac:spMk id="24" creationId="{00000000-0000-0000-0000-000000000000}"/>
+          </ac:spMkLst>
+        </pc:spChg>
+        <pc:spChg chg="mod">
+          <ac:chgData name="Dang Khoa Pham" userId="a0828928-506b-41e7-91fe-334565ca4eb5" providerId="ADAL" clId="{07F4103E-4D85-4DDD-92DF-5DC143FDFFF6}" dt="2026-07-26T11:30:52.497" v="246" actId="14100"/>
+          <ac:spMkLst>
+            <pc:docMk/>
+            <pc:sldMk cId="0" sldId="259"/>
+            <ac:spMk id="26" creationId="{00000000-0000-0000-0000-000000000000}"/>
+          </ac:spMkLst>
+        </pc:spChg>
+        <pc:spChg chg="mod">
+          <ac:chgData name="Dang Khoa Pham" userId="a0828928-506b-41e7-91fe-334565ca4eb5" providerId="ADAL" clId="{07F4103E-4D85-4DDD-92DF-5DC143FDFFF6}" dt="2026-07-26T11:30:37.263" v="243" actId="1076"/>
+          <ac:spMkLst>
+            <pc:docMk/>
+            <pc:sldMk cId="0" sldId="259"/>
+            <ac:spMk id="27" creationId="{00000000-0000-0000-0000-000000000000}"/>
+          </ac:spMkLst>
+        </pc:spChg>
+        <pc:spChg chg="mod">
+          <ac:chgData name="Dang Khoa Pham" userId="a0828928-506b-41e7-91fe-334565ca4eb5" providerId="ADAL" clId="{07F4103E-4D85-4DDD-92DF-5DC143FDFFF6}" dt="2026-07-26T11:30:11.344" v="238" actId="14100"/>
+          <ac:spMkLst>
+            <pc:docMk/>
+            <pc:sldMk cId="0" sldId="259"/>
+            <ac:spMk id="28" creationId="{00000000-0000-0000-0000-000000000000}"/>
+          </ac:spMkLst>
+        </pc:spChg>
+        <pc:spChg chg="mod">
+          <ac:chgData name="Dang Khoa Pham" userId="a0828928-506b-41e7-91fe-334565ca4eb5" providerId="ADAL" clId="{07F4103E-4D85-4DDD-92DF-5DC143FDFFF6}" dt="2026-07-26T11:29:21.624" v="234" actId="1076"/>
+          <ac:spMkLst>
+            <pc:docMk/>
+            <pc:sldMk cId="0" sldId="259"/>
+            <ac:spMk id="29" creationId="{00000000-0000-0000-0000-000000000000}"/>
+          </ac:spMkLst>
+        </pc:spChg>
+        <pc:spChg chg="mod">
+          <ac:chgData name="Dang Khoa Pham" userId="a0828928-506b-41e7-91fe-334565ca4eb5" providerId="ADAL" clId="{07F4103E-4D85-4DDD-92DF-5DC143FDFFF6}" dt="2026-07-26T11:30:37.263" v="243" actId="1076"/>
+          <ac:spMkLst>
+            <pc:docMk/>
+            <pc:sldMk cId="0" sldId="259"/>
+            <ac:spMk id="31" creationId="{00000000-0000-0000-0000-000000000000}"/>
+          </ac:spMkLst>
+        </pc:spChg>
+        <pc:spChg chg="mod">
+          <ac:chgData name="Dang Khoa Pham" userId="a0828928-506b-41e7-91fe-334565ca4eb5" providerId="ADAL" clId="{07F4103E-4D85-4DDD-92DF-5DC143FDFFF6}" dt="2026-07-26T11:30:11.344" v="238" actId="14100"/>
+          <ac:spMkLst>
+            <pc:docMk/>
+            <pc:sldMk cId="0" sldId="259"/>
+            <ac:spMk id="32" creationId="{00000000-0000-0000-0000-000000000000}"/>
+          </ac:spMkLst>
+        </pc:spChg>
+        <pc:spChg chg="mod">
+          <ac:chgData name="Dang Khoa Pham" userId="a0828928-506b-41e7-91fe-334565ca4eb5" providerId="ADAL" clId="{07F4103E-4D85-4DDD-92DF-5DC143FDFFF6}" dt="2026-07-26T11:30:37.263" v="243" actId="1076"/>
+          <ac:spMkLst>
+            <pc:docMk/>
+            <pc:sldMk cId="0" sldId="259"/>
+            <ac:spMk id="35" creationId="{00000000-0000-0000-0000-000000000000}"/>
+          </ac:spMkLst>
+        </pc:spChg>
+        <pc:spChg chg="del">
+          <ac:chgData name="Dang Khoa Pham" userId="a0828928-506b-41e7-91fe-334565ca4eb5" providerId="ADAL" clId="{07F4103E-4D85-4DDD-92DF-5DC143FDFFF6}" dt="2026-07-26T11:29:16.011" v="233" actId="478"/>
+          <ac:spMkLst>
+            <pc:docMk/>
+            <pc:sldMk cId="0" sldId="259"/>
+            <ac:spMk id="36" creationId="{00000000-0000-0000-0000-000000000000}"/>
+          </ac:spMkLst>
+        </pc:spChg>
+        <pc:spChg chg="del">
+          <ac:chgData name="Dang Khoa Pham" userId="a0828928-506b-41e7-91fe-334565ca4eb5" providerId="ADAL" clId="{07F4103E-4D85-4DDD-92DF-5DC143FDFFF6}" dt="2026-07-26T11:29:16.011" v="233" actId="478"/>
+          <ac:spMkLst>
+            <pc:docMk/>
+            <pc:sldMk cId="0" sldId="259"/>
+            <ac:spMk id="37" creationId="{00000000-0000-0000-0000-000000000000}"/>
+          </ac:spMkLst>
+        </pc:spChg>
+        <pc:spChg chg="del mod">
+          <ac:chgData name="Dang Khoa Pham" userId="a0828928-506b-41e7-91fe-334565ca4eb5" providerId="ADAL" clId="{07F4103E-4D85-4DDD-92DF-5DC143FDFFF6}" dt="2026-07-26T11:29:16.011" v="233" actId="478"/>
+          <ac:spMkLst>
+            <pc:docMk/>
+            <pc:sldMk cId="0" sldId="259"/>
+            <ac:spMk id="38" creationId="{00000000-0000-0000-0000-000000000000}"/>
+          </ac:spMkLst>
+        </pc:spChg>
+        <pc:spChg chg="mod">
+          <ac:chgData name="Dang Khoa Pham" userId="a0828928-506b-41e7-91fe-334565ca4eb5" providerId="ADAL" clId="{07F4103E-4D85-4DDD-92DF-5DC143FDFFF6}" dt="2026-07-26T11:27:54.269" v="223" actId="14100"/>
+          <ac:spMkLst>
+            <pc:docMk/>
+            <pc:sldMk cId="0" sldId="259"/>
+            <ac:spMk id="39" creationId="{00000000-0000-0000-0000-000000000000}"/>
+          </ac:spMkLst>
+        </pc:spChg>
       </pc:sldChg>
       <pc:sldChg chg="addSp modSp mod">
-        <pc:chgData name="Dang Khoa Pham" userId="a0828928-506b-41e7-91fe-334565ca4eb5" providerId="ADAL" clId="{07F4103E-4D85-4DDD-92DF-5DC143FDFFF6}" dt="2026-07-26T01:19:54.779" v="214" actId="1076"/>
+        <pc:chgData name="Dang Khoa Pham" userId="a0828928-506b-41e7-91fe-334565ca4eb5" providerId="ADAL" clId="{07F4103E-4D85-4DDD-92DF-5DC143FDFFF6}" dt="2026-07-26T11:31:31.984" v="248" actId="1076"/>
         <pc:sldMkLst>
           <pc:docMk/>
           <pc:sldMk cId="0" sldId="262"/>
@@ -230,6 +460,30 @@
             <pc:docMk/>
             <pc:sldMk cId="0" sldId="262"/>
             <ac:spMk id="14" creationId="{00000000-0000-0000-0000-000000000000}"/>
+          </ac:spMkLst>
+        </pc:spChg>
+        <pc:spChg chg="mod">
+          <ac:chgData name="Dang Khoa Pham" userId="a0828928-506b-41e7-91fe-334565ca4eb5" providerId="ADAL" clId="{07F4103E-4D85-4DDD-92DF-5DC143FDFFF6}" dt="2026-07-26T11:31:31.984" v="248" actId="1076"/>
+          <ac:spMkLst>
+            <pc:docMk/>
+            <pc:sldMk cId="0" sldId="262"/>
+            <ac:spMk id="21" creationId="{00000000-0000-0000-0000-000000000000}"/>
+          </ac:spMkLst>
+        </pc:spChg>
+        <pc:spChg chg="mod">
+          <ac:chgData name="Dang Khoa Pham" userId="a0828928-506b-41e7-91fe-334565ca4eb5" providerId="ADAL" clId="{07F4103E-4D85-4DDD-92DF-5DC143FDFFF6}" dt="2026-07-26T11:31:31.984" v="248" actId="1076"/>
+          <ac:spMkLst>
+            <pc:docMk/>
+            <pc:sldMk cId="0" sldId="262"/>
+            <ac:spMk id="22" creationId="{00000000-0000-0000-0000-000000000000}"/>
+          </ac:spMkLst>
+        </pc:spChg>
+        <pc:spChg chg="mod">
+          <ac:chgData name="Dang Khoa Pham" userId="a0828928-506b-41e7-91fe-334565ca4eb5" providerId="ADAL" clId="{07F4103E-4D85-4DDD-92DF-5DC143FDFFF6}" dt="2026-07-26T11:28:08.798" v="225" actId="14100"/>
+          <ac:spMkLst>
+            <pc:docMk/>
+            <pc:sldMk cId="0" sldId="262"/>
+            <ac:spMk id="26" creationId="{00000000-0000-0000-0000-000000000000}"/>
           </ac:spMkLst>
         </pc:spChg>
         <pc:spChg chg="add mod">
@@ -15400,7 +15654,7 @@
         </p:nvSpPr>
         <p:spPr>
           <a:xfrm>
-            <a:off x="1097280" y="4526280"/>
+            <a:off x="1056132" y="4710454"/>
             <a:ext cx="4160520" cy="320040"/>
           </a:xfrm>
           <a:prstGeom prst="rect">
@@ -15420,7 +15674,7 @@
               </a:lnSpc>
             </a:pPr>
             <a:r>
-              <a:rPr sz="1830" b="0">
+              <a:rPr sz="1830" b="0" dirty="0">
                 <a:solidFill>
                   <a:srgbClr val="111827"/>
                 </a:solidFill>
@@ -15528,7 +15782,7 @@
         </p:nvSpPr>
         <p:spPr>
           <a:xfrm>
-            <a:off x="6720840" y="4526280"/>
+            <a:off x="6711696" y="4663440"/>
             <a:ext cx="4160520" cy="320040"/>
           </a:xfrm>
           <a:prstGeom prst="rect">
@@ -15548,7 +15802,7 @@
               </a:lnSpc>
             </a:pPr>
             <a:r>
-              <a:rPr sz="1700" b="0">
+              <a:rPr sz="1700" b="0" dirty="0">
                 <a:solidFill>
                   <a:srgbClr val="111827"/>
                 </a:solidFill>
@@ -24237,8 +24491,8 @@
         </p:nvSpPr>
         <p:spPr>
           <a:xfrm>
-            <a:off x="1371600" y="1344168"/>
-            <a:ext cx="4297679" cy="256032"/>
+            <a:off x="1371600" y="1298547"/>
+            <a:ext cx="4297679" cy="347275"/>
           </a:xfrm>
           <a:prstGeom prst="rect">
             <a:avLst/>
@@ -24257,13 +24511,13 @@
               </a:lnSpc>
             </a:pPr>
             <a:r>
-              <a:rPr sz="1830" b="1">
+              <a:rPr sz="1830" b="1" dirty="0">
                 <a:solidFill>
                   <a:srgbClr val="1D4ED8"/>
                 </a:solidFill>
                 <a:latin typeface="Aptos"/>
               </a:rPr>
-              <a:t>60% slides</a:t>
+              <a:t>slides</a:t>
             </a:r>
           </a:p>
         </p:txBody>
@@ -24404,8 +24658,8 @@
         </p:nvSpPr>
         <p:spPr>
           <a:xfrm>
-            <a:off x="7040880" y="1344168"/>
-            <a:ext cx="4297679" cy="256032"/>
+            <a:off x="7040880" y="1298547"/>
+            <a:ext cx="4297679" cy="347275"/>
           </a:xfrm>
           <a:prstGeom prst="rect">
             <a:avLst/>
@@ -24424,13 +24678,13 @@
               </a:lnSpc>
             </a:pPr>
             <a:r>
-              <a:rPr sz="1830" b="1">
+              <a:rPr sz="1830" b="1" dirty="0">
                 <a:solidFill>
                   <a:srgbClr val="166534"/>
                 </a:solidFill>
                 <a:latin typeface="Aptos"/>
               </a:rPr>
-              <a:t>40% VS Code demo</a:t>
+              <a:t>VS Code demo</a:t>
             </a:r>
           </a:p>
         </p:txBody>
@@ -25456,7 +25710,7 @@
         <p:spPr>
           <a:xfrm>
             <a:off x="685800" y="1143000"/>
-            <a:ext cx="2487168" cy="960120"/>
+            <a:ext cx="2487168" cy="1316736"/>
           </a:xfrm>
           <a:prstGeom prst="roundRect">
             <a:avLst/>
@@ -25583,8 +25837,8 @@
         </p:nvSpPr>
         <p:spPr>
           <a:xfrm>
-            <a:off x="1371600" y="1581912"/>
-            <a:ext cx="1664208" cy="457200"/>
+            <a:off x="1335024" y="1667486"/>
+            <a:ext cx="1700784" cy="526041"/>
           </a:xfrm>
           <a:prstGeom prst="rect">
             <a:avLst/>
@@ -25603,7 +25857,7 @@
               </a:lnSpc>
             </a:pPr>
             <a:r>
-              <a:rPr sz="1520" b="0">
+              <a:rPr sz="1520" b="0" dirty="0">
                 <a:solidFill>
                   <a:srgbClr val="4B5563"/>
                 </a:solidFill>
@@ -25623,7 +25877,7 @@
         <p:spPr>
           <a:xfrm>
             <a:off x="3520440" y="1143000"/>
-            <a:ext cx="2487168" cy="960120"/>
+            <a:ext cx="2487168" cy="1316736"/>
           </a:xfrm>
           <a:prstGeom prst="roundRect">
             <a:avLst/>
@@ -25750,8 +26004,8 @@
         </p:nvSpPr>
         <p:spPr>
           <a:xfrm>
-            <a:off x="4206240" y="1581912"/>
-            <a:ext cx="1664208" cy="457200"/>
+            <a:off x="4169664" y="1667486"/>
+            <a:ext cx="1700784" cy="700810"/>
           </a:xfrm>
           <a:prstGeom prst="rect">
             <a:avLst/>
@@ -25770,13 +26024,31 @@
               </a:lnSpc>
             </a:pPr>
             <a:r>
-              <a:rPr sz="1580" b="0">
+              <a:rPr sz="1580" b="0" dirty="0">
                 <a:solidFill>
                   <a:srgbClr val="4B5563"/>
                 </a:solidFill>
                 <a:latin typeface="Aptos"/>
               </a:rPr>
-              <a:t>.py script, Python shell, Jupyter Notebook</a:t>
+              <a:t>.</a:t>
+            </a:r>
+            <a:r>
+              <a:rPr sz="1580" b="0" dirty="0" err="1">
+                <a:solidFill>
+                  <a:srgbClr val="4B5563"/>
+                </a:solidFill>
+                <a:latin typeface="Aptos"/>
+              </a:rPr>
+              <a:t>py</a:t>
+            </a:r>
+            <a:r>
+              <a:rPr sz="1580" b="0" dirty="0">
+                <a:solidFill>
+                  <a:srgbClr val="4B5563"/>
+                </a:solidFill>
+                <a:latin typeface="Aptos"/>
+              </a:rPr>
+              <a:t> script, Python shell, Jupyter Notebook</a:t>
             </a:r>
           </a:p>
         </p:txBody>
@@ -25790,7 +26062,7 @@
         <p:spPr>
           <a:xfrm>
             <a:off x="6355080" y="1143000"/>
-            <a:ext cx="2487168" cy="960120"/>
+            <a:ext cx="2487168" cy="1316736"/>
           </a:xfrm>
           <a:prstGeom prst="roundRect">
             <a:avLst/>
@@ -25917,8 +26189,8 @@
         </p:nvSpPr>
         <p:spPr>
           <a:xfrm>
-            <a:off x="7040880" y="1581912"/>
-            <a:ext cx="1664208" cy="457200"/>
+            <a:off x="7004304" y="1667486"/>
+            <a:ext cx="1700784" cy="700810"/>
           </a:xfrm>
           <a:prstGeom prst="rect">
             <a:avLst/>
@@ -25937,7 +26209,7 @@
               </a:lnSpc>
             </a:pPr>
             <a:r>
-              <a:rPr sz="1580" b="0">
+              <a:rPr sz="1580" b="0" dirty="0">
                 <a:solidFill>
                   <a:srgbClr val="4B5563"/>
                 </a:solidFill>
@@ -25957,7 +26229,7 @@
         <p:spPr>
           <a:xfrm>
             <a:off x="9189720" y="1143000"/>
-            <a:ext cx="2487168" cy="960120"/>
+            <a:ext cx="2487168" cy="1316736"/>
           </a:xfrm>
           <a:prstGeom prst="roundRect">
             <a:avLst/>
@@ -26084,8 +26356,8 @@
         </p:nvSpPr>
         <p:spPr>
           <a:xfrm>
-            <a:off x="9875520" y="1581912"/>
-            <a:ext cx="1664208" cy="457200"/>
+            <a:off x="9838944" y="1667486"/>
+            <a:ext cx="1700784" cy="750590"/>
           </a:xfrm>
           <a:prstGeom prst="rect">
             <a:avLst/>
@@ -26104,13 +26376,31 @@
               </a:lnSpc>
             </a:pPr>
             <a:r>
-              <a:rPr sz="1520" b="0">
+              <a:rPr sz="1520" b="0" dirty="0">
                 <a:solidFill>
                   <a:srgbClr val="4B5563"/>
                 </a:solidFill>
                 <a:latin typeface="Aptos"/>
               </a:rPr>
-              <a:t>comparisons, and/or/not, if/elif/else</a:t>
+              <a:t>comparisons, and/or/not, if/</a:t>
+            </a:r>
+            <a:r>
+              <a:rPr sz="1520" b="0" dirty="0" err="1">
+                <a:solidFill>
+                  <a:srgbClr val="4B5563"/>
+                </a:solidFill>
+                <a:latin typeface="Aptos"/>
+              </a:rPr>
+              <a:t>elif</a:t>
+            </a:r>
+            <a:r>
+              <a:rPr sz="1520" b="0" dirty="0">
+                <a:solidFill>
+                  <a:srgbClr val="4B5563"/>
+                </a:solidFill>
+                <a:latin typeface="Aptos"/>
+              </a:rPr>
+              <a:t>/else</a:t>
             </a:r>
           </a:p>
         </p:txBody>
@@ -26123,8 +26413,8 @@
         </p:nvSpPr>
         <p:spPr>
           <a:xfrm>
-            <a:off x="685800" y="2441448"/>
-            <a:ext cx="2487168" cy="960120"/>
+            <a:off x="685800" y="2980944"/>
+            <a:ext cx="2487168" cy="1316736"/>
           </a:xfrm>
           <a:prstGeom prst="roundRect">
             <a:avLst/>
@@ -26173,7 +26463,7 @@
         </p:nvSpPr>
         <p:spPr>
           <a:xfrm>
-            <a:off x="777240" y="2569464"/>
+            <a:off x="777240" y="3108960"/>
             <a:ext cx="502920" cy="411480"/>
           </a:xfrm>
           <a:prstGeom prst="rect">
@@ -26212,8 +26502,8 @@
         </p:nvSpPr>
         <p:spPr>
           <a:xfrm>
-            <a:off x="1371600" y="2551176"/>
-            <a:ext cx="1664208" cy="256032"/>
+            <a:off x="1371600" y="3045051"/>
+            <a:ext cx="1801368" cy="347275"/>
           </a:xfrm>
           <a:prstGeom prst="rect">
             <a:avLst/>
@@ -26232,7 +26522,7 @@
               </a:lnSpc>
             </a:pPr>
             <a:r>
-              <a:rPr sz="1830" b="1">
+              <a:rPr sz="1830" b="1" dirty="0">
                 <a:solidFill>
                   <a:srgbClr val="111827"/>
                 </a:solidFill>
@@ -26251,7 +26541,7 @@
         </p:nvSpPr>
         <p:spPr>
           <a:xfrm>
-            <a:off x="1371600" y="2880360"/>
+            <a:off x="1371600" y="3621024"/>
             <a:ext cx="1664208" cy="457200"/>
           </a:xfrm>
           <a:prstGeom prst="rect">
@@ -26271,7 +26561,7 @@
               </a:lnSpc>
             </a:pPr>
             <a:r>
-              <a:rPr sz="1520" b="0">
+              <a:rPr sz="1520" b="0" dirty="0">
                 <a:solidFill>
                   <a:srgbClr val="4B5563"/>
                 </a:solidFill>
@@ -26290,8 +26580,8 @@
         </p:nvSpPr>
         <p:spPr>
           <a:xfrm>
-            <a:off x="3520440" y="2441448"/>
-            <a:ext cx="2487168" cy="960120"/>
+            <a:off x="3520440" y="2980944"/>
+            <a:ext cx="2487168" cy="1316736"/>
           </a:xfrm>
           <a:prstGeom prst="roundRect">
             <a:avLst/>
@@ -26340,7 +26630,7 @@
         </p:nvSpPr>
         <p:spPr>
           <a:xfrm>
-            <a:off x="3611880" y="2569464"/>
+            <a:off x="3611880" y="3108960"/>
             <a:ext cx="502920" cy="411480"/>
           </a:xfrm>
           <a:prstGeom prst="rect">
@@ -26379,8 +26669,8 @@
         </p:nvSpPr>
         <p:spPr>
           <a:xfrm>
-            <a:off x="4206240" y="2551176"/>
-            <a:ext cx="1664208" cy="256032"/>
+            <a:off x="4206240" y="2973943"/>
+            <a:ext cx="1737360" cy="617605"/>
           </a:xfrm>
           <a:prstGeom prst="rect">
             <a:avLst/>
@@ -26399,7 +26689,7 @@
               </a:lnSpc>
             </a:pPr>
             <a:r>
-              <a:rPr sz="1830" b="1">
+              <a:rPr sz="1830" b="1" dirty="0">
                 <a:solidFill>
                   <a:srgbClr val="1D4ED8"/>
                 </a:solidFill>
@@ -26418,7 +26708,7 @@
         </p:nvSpPr>
         <p:spPr>
           <a:xfrm>
-            <a:off x="4206240" y="2880360"/>
+            <a:off x="4206240" y="3621024"/>
             <a:ext cx="1664208" cy="457200"/>
           </a:xfrm>
           <a:prstGeom prst="rect">
@@ -26457,8 +26747,8 @@
         </p:nvSpPr>
         <p:spPr>
           <a:xfrm>
-            <a:off x="6355080" y="2441448"/>
-            <a:ext cx="2487168" cy="960120"/>
+            <a:off x="6355080" y="2980944"/>
+            <a:ext cx="2487168" cy="1316736"/>
           </a:xfrm>
           <a:prstGeom prst="roundRect">
             <a:avLst/>
@@ -26507,7 +26797,7 @@
         </p:nvSpPr>
         <p:spPr>
           <a:xfrm>
-            <a:off x="6446520" y="2569464"/>
+            <a:off x="6446520" y="3108960"/>
             <a:ext cx="502920" cy="411480"/>
           </a:xfrm>
           <a:prstGeom prst="rect">
@@ -26546,7 +26836,7 @@
         </p:nvSpPr>
         <p:spPr>
           <a:xfrm>
-            <a:off x="7040880" y="2551176"/>
+            <a:off x="7040880" y="3090672"/>
             <a:ext cx="1664208" cy="256032"/>
           </a:xfrm>
           <a:prstGeom prst="rect">
@@ -26585,7 +26875,7 @@
         </p:nvSpPr>
         <p:spPr>
           <a:xfrm>
-            <a:off x="7040880" y="2880360"/>
+            <a:off x="7040880" y="3621024"/>
             <a:ext cx="1664208" cy="457200"/>
           </a:xfrm>
           <a:prstGeom prst="rect">
@@ -26624,8 +26914,8 @@
         </p:nvSpPr>
         <p:spPr>
           <a:xfrm>
-            <a:off x="9189720" y="2441448"/>
-            <a:ext cx="2487168" cy="960120"/>
+            <a:off x="9189720" y="2980944"/>
+            <a:ext cx="2487168" cy="1316736"/>
           </a:xfrm>
           <a:prstGeom prst="roundRect">
             <a:avLst/>
@@ -26674,7 +26964,7 @@
         </p:nvSpPr>
         <p:spPr>
           <a:xfrm>
-            <a:off x="9281160" y="2569464"/>
+            <a:off x="9281160" y="3108960"/>
             <a:ext cx="502920" cy="411480"/>
           </a:xfrm>
           <a:prstGeom prst="rect">
@@ -26713,7 +27003,7 @@
         </p:nvSpPr>
         <p:spPr>
           <a:xfrm>
-            <a:off x="9875520" y="2551176"/>
+            <a:off x="9875520" y="3090672"/>
             <a:ext cx="1664208" cy="256032"/>
           </a:xfrm>
           <a:prstGeom prst="rect">
@@ -26752,7 +27042,7 @@
         </p:nvSpPr>
         <p:spPr>
           <a:xfrm>
-            <a:off x="9875520" y="2880360"/>
+            <a:off x="9875520" y="3621024"/>
             <a:ext cx="1664208" cy="457200"/>
           </a:xfrm>
           <a:prstGeom prst="rect">
@@ -26785,24 +27075,24 @@
       </p:sp>
       <p:sp>
         <p:nvSpPr>
-          <p:cNvPr id="36" name="Rounded Rectangle 35"/>
-          <p:cNvSpPr/>
-          <p:nvPr/>
-        </p:nvSpPr>
-        <p:spPr>
-          <a:xfrm>
-            <a:off x="914400" y="4343400"/>
-            <a:ext cx="10378440" cy="804672"/>
+          <p:cNvPr id="39" name="Rounded Rectangle 38"/>
+          <p:cNvSpPr/>
+          <p:nvPr/>
+        </p:nvSpPr>
+        <p:spPr>
+          <a:xfrm>
+            <a:off x="2240280" y="5623560"/>
+            <a:ext cx="7680960" cy="872131"/>
           </a:xfrm>
           <a:prstGeom prst="roundRect">
             <a:avLst/>
           </a:prstGeom>
           <a:solidFill>
-            <a:srgbClr val="FEE2E2"/>
+            <a:srgbClr val="0F172A"/>
           </a:solidFill>
           <a:ln>
             <a:solidFill>
-              <a:srgbClr val="FEE2E2"/>
+              <a:srgbClr val="0F172A"/>
             </a:solidFill>
           </a:ln>
         </p:spPr>
@@ -26835,134 +27125,6 @@
       </p:sp>
       <p:sp>
         <p:nvSpPr>
-          <p:cNvPr id="37" name="TextBox 36"/>
-          <p:cNvSpPr txBox="1"/>
-          <p:nvPr/>
-        </p:nvSpPr>
-        <p:spPr>
-          <a:xfrm>
-            <a:off x="1143000" y="4590288"/>
-            <a:ext cx="1920240" cy="210312"/>
-          </a:xfrm>
-          <a:prstGeom prst="rect">
-            <a:avLst/>
-          </a:prstGeom>
-          <a:noFill/>
-        </p:spPr>
-        <p:txBody>
-          <a:bodyPr wrap="square" lIns="38100" tIns="38100" rIns="38100" bIns="38100" anchor="ctr">
-            <a:spAutoFit/>
-          </a:bodyPr>
-          <a:lstStyle/>
-          <a:p>
-            <a:pPr algn="l">
-              <a:lnSpc>
-                <a:spcPct val="96000"/>
-              </a:lnSpc>
-            </a:pPr>
-            <a:r>
-              <a:rPr sz="1830" b="1">
-                <a:solidFill>
-                  <a:srgbClr val="B91C1C"/>
-                </a:solidFill>
-                <a:latin typeface="Aptos"/>
-              </a:rPr>
-              <a:t>Cut to save time</a:t>
-            </a:r>
-          </a:p>
-        </p:txBody>
-      </p:sp>
-      <p:sp>
-        <p:nvSpPr>
-          <p:cNvPr id="38" name="TextBox 37"/>
-          <p:cNvSpPr txBox="1"/>
-          <p:nvPr/>
-        </p:nvSpPr>
-        <p:spPr>
-          <a:xfrm>
-            <a:off x="3063240" y="4590288"/>
-            <a:ext cx="7589520" cy="210312"/>
-          </a:xfrm>
-          <a:prstGeom prst="rect">
-            <a:avLst/>
-          </a:prstGeom>
-          <a:noFill/>
-        </p:spPr>
-        <p:txBody>
-          <a:bodyPr wrap="square" lIns="38100" tIns="38100" rIns="38100" bIns="38100" anchor="ctr">
-            <a:spAutoFit/>
-          </a:bodyPr>
-          <a:lstStyle/>
-          <a:p>
-            <a:pPr algn="l">
-              <a:lnSpc>
-                <a:spcPct val="96000"/>
-              </a:lnSpc>
-            </a:pPr>
-            <a:r>
-              <a:rPr sz="1680" b="0">
-                <a:solidFill>
-                  <a:srgbClr val="111827"/>
-                </a:solidFill>
-                <a:latin typeface="Aptos"/>
-              </a:rPr>
-              <a:t>No OOP/classes, decorators, generators, complex ML math or deep learning implementation in this beginner session.</a:t>
-            </a:r>
-          </a:p>
-        </p:txBody>
-      </p:sp>
-      <p:sp>
-        <p:nvSpPr>
-          <p:cNvPr id="39" name="Rounded Rectangle 38"/>
-          <p:cNvSpPr/>
-          <p:nvPr/>
-        </p:nvSpPr>
-        <p:spPr>
-          <a:xfrm>
-            <a:off x="2240280" y="5623560"/>
-            <a:ext cx="7680960" cy="502920"/>
-          </a:xfrm>
-          <a:prstGeom prst="roundRect">
-            <a:avLst/>
-          </a:prstGeom>
-          <a:solidFill>
-            <a:srgbClr val="0F172A"/>
-          </a:solidFill>
-          <a:ln>
-            <a:solidFill>
-              <a:srgbClr val="0F172A"/>
-            </a:solidFill>
-          </a:ln>
-        </p:spPr>
-        <p:style>
-          <a:lnRef idx="1">
-            <a:schemeClr val="accent1"/>
-          </a:lnRef>
-          <a:fillRef idx="3">
-            <a:schemeClr val="accent1"/>
-          </a:fillRef>
-          <a:effectRef idx="2">
-            <a:schemeClr val="accent1"/>
-          </a:effectRef>
-          <a:fontRef idx="minor">
-            <a:schemeClr val="lt1"/>
-          </a:fontRef>
-        </p:style>
-        <p:txBody>
-          <a:bodyPr wrap="square" lIns="38100" tIns="38100" rIns="38100" bIns="38100" rtlCol="0" anchor="ctr"/>
-          <a:lstStyle/>
-          <a:p>
-            <a:pPr algn="ctr">
-              <a:lnSpc>
-                <a:spcPct val="96000"/>
-              </a:lnSpc>
-            </a:pPr>
-            <a:endParaRPr/>
-          </a:p>
-        </p:txBody>
-      </p:sp>
-      <p:sp>
-        <p:nvSpPr>
           <p:cNvPr id="40" name="TextBox 39"/>
           <p:cNvSpPr txBox="1"/>
           <p:nvPr/>
@@ -26989,7 +27151,7 @@
               </a:lnSpc>
             </a:pPr>
             <a:r>
-              <a:rPr sz="1680" b="0">
+              <a:rPr sz="1680" b="0" dirty="0">
                 <a:solidFill>
                   <a:srgbClr val="F8FAFC"/>
                 </a:solidFill>
@@ -30211,7 +30373,7 @@
         </p:nvSpPr>
         <p:spPr>
           <a:xfrm>
-            <a:off x="731520" y="3273552"/>
+            <a:off x="624841" y="3141460"/>
             <a:ext cx="5166360" cy="1417320"/>
           </a:xfrm>
           <a:prstGeom prst="roundRect">
@@ -30261,7 +30423,7 @@
         </p:nvSpPr>
         <p:spPr>
           <a:xfrm>
-            <a:off x="868680" y="3401568"/>
+            <a:off x="762001" y="3269476"/>
             <a:ext cx="4892040" cy="1188720"/>
           </a:xfrm>
           <a:prstGeom prst="rect">
@@ -30281,15 +30443,42 @@
               </a:lnSpc>
             </a:pPr>
             <a:r>
-              <a:rPr sz="1800" b="0">
+              <a:rPr sz="1800" b="0" dirty="0" err="1">
                 <a:solidFill>
                   <a:srgbClr val="F8FAFC"/>
                 </a:solidFill>
                 <a:latin typeface="Cascadia Mono"/>
               </a:rPr>
-              <a:t>py --version
+              <a:t>py</a:t>
+            </a:r>
+            <a:r>
+              <a:rPr sz="1800" b="0" dirty="0">
+                <a:solidFill>
+                  <a:srgbClr val="F8FAFC"/>
+                </a:solidFill>
+                <a:latin typeface="Cascadia Mono"/>
+              </a:rPr>
+              <a:t> --version
 python --version
-py -m pip install notebook pandas matplotlib</a:t>
+</a:t>
+            </a:r>
+            <a:r>
+              <a:rPr sz="1800" b="0" dirty="0" err="1">
+                <a:solidFill>
+                  <a:srgbClr val="F8FAFC"/>
+                </a:solidFill>
+                <a:latin typeface="Cascadia Mono"/>
+              </a:rPr>
+              <a:t>py</a:t>
+            </a:r>
+            <a:r>
+              <a:rPr sz="1800" b="0" dirty="0">
+                <a:solidFill>
+                  <a:srgbClr val="F8FAFC"/>
+                </a:solidFill>
+                <a:latin typeface="Cascadia Mono"/>
+              </a:rPr>
+              <a:t> -m pip install notebook pandas matplotlib</a:t>
             </a:r>
           </a:p>
         </p:txBody>
@@ -30411,14 +30600,29 @@
               </a:lnSpc>
             </a:pPr>
             <a:r>
-              <a:rPr sz="1680" b="0">
+              <a:rPr sz="1680" b="0" dirty="0">
                 <a:solidFill>
                   <a:srgbClr val="111827"/>
                 </a:solidFill>
                 <a:latin typeface="Aptos"/>
               </a:rPr>
-              <a:t>If Python is not found, check PATH or use the Python launcher command: py</a:t>
-            </a:r>
+              <a:t>If Python is not found, check PATH or use the Python launcher command: </a:t>
+            </a:r>
+            <a:r>
+              <a:rPr sz="1680" b="0" dirty="0" err="1">
+                <a:solidFill>
+                  <a:srgbClr val="111827"/>
+                </a:solidFill>
+                <a:latin typeface="Aptos"/>
+              </a:rPr>
+              <a:t>py</a:t>
+            </a:r>
+            <a:endParaRPr sz="1680" b="0" dirty="0">
+              <a:solidFill>
+                <a:srgbClr val="111827"/>
+              </a:solidFill>
+              <a:latin typeface="Aptos"/>
+            </a:endParaRPr>
           </a:p>
         </p:txBody>
       </p:sp>
@@ -30431,7 +30635,7 @@
         <p:spPr>
           <a:xfrm>
             <a:off x="1325880" y="5230368"/>
-            <a:ext cx="9555480" cy="594360"/>
+            <a:ext cx="9555480" cy="747738"/>
           </a:xfrm>
           <a:prstGeom prst="roundRect">
             <a:avLst/>

--- a/CDU_Python_Beginner_Workshop_Section1.pptx
+++ b/CDU_Python_Beginner_Workshop_Section1.pptx
@@ -152,22 +152,70 @@
   <pc:docChgLst>
     <pc:chgData name="Dang Khoa Pham" userId="a0828928-506b-41e7-91fe-334565ca4eb5" providerId="ADAL" clId="{07F4103E-4D85-4DDD-92DF-5DC143FDFFF6}"/>
     <pc:docChg chg="undo custSel modSld modShowInfo">
-      <pc:chgData name="Dang Khoa Pham" userId="a0828928-506b-41e7-91fe-334565ca4eb5" providerId="ADAL" clId="{07F4103E-4D85-4DDD-92DF-5DC143FDFFF6}" dt="2026-07-26T11:32:11.061" v="250" actId="20577"/>
+      <pc:chgData name="Dang Khoa Pham" userId="a0828928-506b-41e7-91fe-334565ca4eb5" providerId="ADAL" clId="{07F4103E-4D85-4DDD-92DF-5DC143FDFFF6}" dt="2026-07-26T11:42:32.898" v="359" actId="1076"/>
       <pc:docMkLst>
         <pc:docMk/>
       </pc:docMkLst>
-      <pc:sldChg chg="addSp modSp mod">
-        <pc:chgData name="Dang Khoa Pham" userId="a0828928-506b-41e7-91fe-334565ca4eb5" providerId="ADAL" clId="{07F4103E-4D85-4DDD-92DF-5DC143FDFFF6}" dt="2026-07-26T01:20:50.485" v="218" actId="20577"/>
+      <pc:sldChg chg="addSp delSp modSp mod">
+        <pc:chgData name="Dang Khoa Pham" userId="a0828928-506b-41e7-91fe-334565ca4eb5" providerId="ADAL" clId="{07F4103E-4D85-4DDD-92DF-5DC143FDFFF6}" dt="2026-07-26T11:39:01.977" v="312" actId="20577"/>
         <pc:sldMkLst>
           <pc:docMk/>
           <pc:sldMk cId="0" sldId="256"/>
         </pc:sldMkLst>
         <pc:spChg chg="mod">
-          <ac:chgData name="Dang Khoa Pham" userId="a0828928-506b-41e7-91fe-334565ca4eb5" providerId="ADAL" clId="{07F4103E-4D85-4DDD-92DF-5DC143FDFFF6}" dt="2026-07-26T01:15:37.298" v="81" actId="14100"/>
+          <ac:chgData name="Dang Khoa Pham" userId="a0828928-506b-41e7-91fe-334565ca4eb5" providerId="ADAL" clId="{07F4103E-4D85-4DDD-92DF-5DC143FDFFF6}" dt="2026-07-26T11:37:42.124" v="258" actId="20577"/>
           <ac:spMkLst>
             <pc:docMk/>
             <pc:sldMk cId="0" sldId="256"/>
             <ac:spMk id="4" creationId="{00000000-0000-0000-0000-000000000000}"/>
+          </ac:spMkLst>
+        </pc:spChg>
+        <pc:spChg chg="del">
+          <ac:chgData name="Dang Khoa Pham" userId="a0828928-506b-41e7-91fe-334565ca4eb5" providerId="ADAL" clId="{07F4103E-4D85-4DDD-92DF-5DC143FDFFF6}" dt="2026-07-26T11:37:56.442" v="259" actId="478"/>
+          <ac:spMkLst>
+            <pc:docMk/>
+            <pc:sldMk cId="0" sldId="256"/>
+            <ac:spMk id="20" creationId="{00000000-0000-0000-0000-000000000000}"/>
+          </ac:spMkLst>
+        </pc:spChg>
+        <pc:spChg chg="del">
+          <ac:chgData name="Dang Khoa Pham" userId="a0828928-506b-41e7-91fe-334565ca4eb5" providerId="ADAL" clId="{07F4103E-4D85-4DDD-92DF-5DC143FDFFF6}" dt="2026-07-26T11:37:56.442" v="259" actId="478"/>
+          <ac:spMkLst>
+            <pc:docMk/>
+            <pc:sldMk cId="0" sldId="256"/>
+            <ac:spMk id="21" creationId="{00000000-0000-0000-0000-000000000000}"/>
+          </ac:spMkLst>
+        </pc:spChg>
+        <pc:spChg chg="del">
+          <ac:chgData name="Dang Khoa Pham" userId="a0828928-506b-41e7-91fe-334565ca4eb5" providerId="ADAL" clId="{07F4103E-4D85-4DDD-92DF-5DC143FDFFF6}" dt="2026-07-26T11:37:32.149" v="251" actId="478"/>
+          <ac:spMkLst>
+            <pc:docMk/>
+            <pc:sldMk cId="0" sldId="256"/>
+            <ac:spMk id="22" creationId="{00000000-0000-0000-0000-000000000000}"/>
+          </ac:spMkLst>
+        </pc:spChg>
+        <pc:spChg chg="del">
+          <ac:chgData name="Dang Khoa Pham" userId="a0828928-506b-41e7-91fe-334565ca4eb5" providerId="ADAL" clId="{07F4103E-4D85-4DDD-92DF-5DC143FDFFF6}" dt="2026-07-26T11:37:33.101" v="252" actId="478"/>
+          <ac:spMkLst>
+            <pc:docMk/>
+            <pc:sldMk cId="0" sldId="256"/>
+            <ac:spMk id="23" creationId="{00000000-0000-0000-0000-000000000000}"/>
+          </ac:spMkLst>
+        </pc:spChg>
+        <pc:spChg chg="del mod">
+          <ac:chgData name="Dang Khoa Pham" userId="a0828928-506b-41e7-91fe-334565ca4eb5" providerId="ADAL" clId="{07F4103E-4D85-4DDD-92DF-5DC143FDFFF6}" dt="2026-07-26T11:37:35.003" v="254" actId="478"/>
+          <ac:spMkLst>
+            <pc:docMk/>
+            <pc:sldMk cId="0" sldId="256"/>
+            <ac:spMk id="24" creationId="{00000000-0000-0000-0000-000000000000}"/>
+          </ac:spMkLst>
+        </pc:spChg>
+        <pc:spChg chg="mod">
+          <ac:chgData name="Dang Khoa Pham" userId="a0828928-506b-41e7-91fe-334565ca4eb5" providerId="ADAL" clId="{07F4103E-4D85-4DDD-92DF-5DC143FDFFF6}" dt="2026-07-26T11:38:34.650" v="279" actId="1076"/>
+          <ac:spMkLst>
+            <pc:docMk/>
+            <pc:sldMk cId="0" sldId="256"/>
+            <ac:spMk id="44" creationId="{00000000-0000-0000-0000-000000000000}"/>
           </ac:spMkLst>
         </pc:spChg>
         <pc:spChg chg="add mod">
@@ -176,6 +224,14 @@
             <pc:docMk/>
             <pc:sldMk cId="0" sldId="256"/>
             <ac:spMk id="46" creationId="{7C7CDE32-4439-98CD-C106-B05A724ECD83}"/>
+          </ac:spMkLst>
+        </pc:spChg>
+        <pc:spChg chg="add mod">
+          <ac:chgData name="Dang Khoa Pham" userId="a0828928-506b-41e7-91fe-334565ca4eb5" providerId="ADAL" clId="{07F4103E-4D85-4DDD-92DF-5DC143FDFFF6}" dt="2026-07-26T11:39:01.977" v="312" actId="20577"/>
+          <ac:spMkLst>
+            <pc:docMk/>
+            <pc:sldMk cId="0" sldId="256"/>
+            <ac:spMk id="48" creationId="{4B322294-D7B6-BFDC-5E53-6A3DFFD4E775}"/>
           </ac:spMkLst>
         </pc:spChg>
         <pc:picChg chg="add mod">
@@ -188,17 +244,33 @@
         </pc:picChg>
       </pc:sldChg>
       <pc:sldChg chg="modSp mod">
-        <pc:chgData name="Dang Khoa Pham" userId="a0828928-506b-41e7-91fe-334565ca4eb5" providerId="ADAL" clId="{07F4103E-4D85-4DDD-92DF-5DC143FDFFF6}" dt="2026-07-26T11:27:41.788" v="221" actId="1076"/>
+        <pc:chgData name="Dang Khoa Pham" userId="a0828928-506b-41e7-91fe-334565ca4eb5" providerId="ADAL" clId="{07F4103E-4D85-4DDD-92DF-5DC143FDFFF6}" dt="2026-07-26T11:39:14.347" v="314" actId="14100"/>
         <pc:sldMkLst>
           <pc:docMk/>
           <pc:sldMk cId="0" sldId="257"/>
         </pc:sldMkLst>
+        <pc:spChg chg="mod">
+          <ac:chgData name="Dang Khoa Pham" userId="a0828928-506b-41e7-91fe-334565ca4eb5" providerId="ADAL" clId="{07F4103E-4D85-4DDD-92DF-5DC143FDFFF6}" dt="2026-07-26T11:39:12.044" v="313" actId="14100"/>
+          <ac:spMkLst>
+            <pc:docMk/>
+            <pc:sldMk cId="0" sldId="257"/>
+            <ac:spMk id="34" creationId="{00000000-0000-0000-0000-000000000000}"/>
+          </ac:spMkLst>
+        </pc:spChg>
         <pc:spChg chg="mod">
           <ac:chgData name="Dang Khoa Pham" userId="a0828928-506b-41e7-91fe-334565ca4eb5" providerId="ADAL" clId="{07F4103E-4D85-4DDD-92DF-5DC143FDFFF6}" dt="2026-07-26T11:27:38.568" v="220" actId="1076"/>
           <ac:spMkLst>
             <pc:docMk/>
             <pc:sldMk cId="0" sldId="257"/>
             <ac:spMk id="35" creationId="{00000000-0000-0000-0000-000000000000}"/>
+          </ac:spMkLst>
+        </pc:spChg>
+        <pc:spChg chg="mod">
+          <ac:chgData name="Dang Khoa Pham" userId="a0828928-506b-41e7-91fe-334565ca4eb5" providerId="ADAL" clId="{07F4103E-4D85-4DDD-92DF-5DC143FDFFF6}" dt="2026-07-26T11:39:14.347" v="314" actId="14100"/>
+          <ac:spMkLst>
+            <pc:docMk/>
+            <pc:sldMk cId="0" sldId="257"/>
+            <ac:spMk id="37" creationId="{00000000-0000-0000-0000-000000000000}"/>
           </ac:spMkLst>
         </pc:spChg>
         <pc:spChg chg="mod">
@@ -429,6 +501,21 @@
             <pc:docMk/>
             <pc:sldMk cId="0" sldId="259"/>
             <ac:spMk id="39" creationId="{00000000-0000-0000-0000-000000000000}"/>
+          </ac:spMkLst>
+        </pc:spChg>
+      </pc:sldChg>
+      <pc:sldChg chg="modSp mod">
+        <pc:chgData name="Dang Khoa Pham" userId="a0828928-506b-41e7-91fe-334565ca4eb5" providerId="ADAL" clId="{07F4103E-4D85-4DDD-92DF-5DC143FDFFF6}" dt="2026-07-26T11:39:34.771" v="315" actId="14100"/>
+        <pc:sldMkLst>
+          <pc:docMk/>
+          <pc:sldMk cId="0" sldId="260"/>
+        </pc:sldMkLst>
+        <pc:spChg chg="mod">
+          <ac:chgData name="Dang Khoa Pham" userId="a0828928-506b-41e7-91fe-334565ca4eb5" providerId="ADAL" clId="{07F4103E-4D85-4DDD-92DF-5DC143FDFFF6}" dt="2026-07-26T11:39:34.771" v="315" actId="14100"/>
+          <ac:spMkLst>
+            <pc:docMk/>
+            <pc:sldMk cId="0" sldId="260"/>
+            <ac:spMk id="10" creationId="{00000000-0000-0000-0000-000000000000}"/>
           </ac:spMkLst>
         </pc:spChg>
       </pc:sldChg>
@@ -815,13 +902,13 @@
         </pc:spChg>
       </pc:sldChg>
       <pc:sldChg chg="modSp mod">
-        <pc:chgData name="Dang Khoa Pham" userId="a0828928-506b-41e7-91fe-334565ca4eb5" providerId="ADAL" clId="{07F4103E-4D85-4DDD-92DF-5DC143FDFFF6}" dt="2026-07-26T01:14:59.925" v="58" actId="27636"/>
+        <pc:chgData name="Dang Khoa Pham" userId="a0828928-506b-41e7-91fe-334565ca4eb5" providerId="ADAL" clId="{07F4103E-4D85-4DDD-92DF-5DC143FDFFF6}" dt="2026-07-26T11:40:36.104" v="324" actId="404"/>
         <pc:sldMkLst>
           <pc:docMk/>
           <pc:sldMk cId="0" sldId="277"/>
         </pc:sldMkLst>
         <pc:spChg chg="mod">
-          <ac:chgData name="Dang Khoa Pham" userId="a0828928-506b-41e7-91fe-334565ca4eb5" providerId="ADAL" clId="{07F4103E-4D85-4DDD-92DF-5DC143FDFFF6}" dt="2026-07-26T01:14:59.915" v="54" actId="27636"/>
+          <ac:chgData name="Dang Khoa Pham" userId="a0828928-506b-41e7-91fe-334565ca4eb5" providerId="ADAL" clId="{07F4103E-4D85-4DDD-92DF-5DC143FDFFF6}" dt="2026-07-26T11:40:27.041" v="320" actId="255"/>
           <ac:spMkLst>
             <pc:docMk/>
             <pc:sldMk cId="0" sldId="277"/>
@@ -845,7 +932,7 @@
           </ac:spMkLst>
         </pc:spChg>
         <pc:spChg chg="mod">
-          <ac:chgData name="Dang Khoa Pham" userId="a0828928-506b-41e7-91fe-334565ca4eb5" providerId="ADAL" clId="{07F4103E-4D85-4DDD-92DF-5DC143FDFFF6}" dt="2026-07-26T01:14:59.925" v="58" actId="27636"/>
+          <ac:chgData name="Dang Khoa Pham" userId="a0828928-506b-41e7-91fe-334565ca4eb5" providerId="ADAL" clId="{07F4103E-4D85-4DDD-92DF-5DC143FDFFF6}" dt="2026-07-26T11:40:36.104" v="324" actId="404"/>
           <ac:spMkLst>
             <pc:docMk/>
             <pc:sldMk cId="0" sldId="277"/>
@@ -862,13 +949,13 @@
         </pc:spChg>
       </pc:sldChg>
       <pc:sldChg chg="modSp mod">
-        <pc:chgData name="Dang Khoa Pham" userId="a0828928-506b-41e7-91fe-334565ca4eb5" providerId="ADAL" clId="{07F4103E-4D85-4DDD-92DF-5DC143FDFFF6}" dt="2026-07-26T01:14:59.997" v="65" actId="27636"/>
+        <pc:chgData name="Dang Khoa Pham" userId="a0828928-506b-41e7-91fe-334565ca4eb5" providerId="ADAL" clId="{07F4103E-4D85-4DDD-92DF-5DC143FDFFF6}" dt="2026-07-26T11:40:44.029" v="326" actId="27636"/>
         <pc:sldMkLst>
           <pc:docMk/>
           <pc:sldMk cId="0" sldId="278"/>
         </pc:sldMkLst>
         <pc:spChg chg="mod">
-          <ac:chgData name="Dang Khoa Pham" userId="a0828928-506b-41e7-91fe-334565ca4eb5" providerId="ADAL" clId="{07F4103E-4D85-4DDD-92DF-5DC143FDFFF6}" dt="2026-07-26T01:14:59.982" v="61" actId="27636"/>
+          <ac:chgData name="Dang Khoa Pham" userId="a0828928-506b-41e7-91fe-334565ca4eb5" providerId="ADAL" clId="{07F4103E-4D85-4DDD-92DF-5DC143FDFFF6}" dt="2026-07-26T11:40:44.029" v="326" actId="27636"/>
           <ac:spMkLst>
             <pc:docMk/>
             <pc:sldMk cId="0" sldId="278"/>
@@ -1039,6 +1126,117 @@
             <pc:docMk/>
             <pc:sldMk cId="0" sldId="280"/>
             <ac:spMk id="24" creationId="{00000000-0000-0000-0000-000000000000}"/>
+          </ac:spMkLst>
+        </pc:spChg>
+      </pc:sldChg>
+      <pc:sldChg chg="modSp mod">
+        <pc:chgData name="Dang Khoa Pham" userId="a0828928-506b-41e7-91fe-334565ca4eb5" providerId="ADAL" clId="{07F4103E-4D85-4DDD-92DF-5DC143FDFFF6}" dt="2026-07-26T11:42:32.898" v="359" actId="1076"/>
+        <pc:sldMkLst>
+          <pc:docMk/>
+          <pc:sldMk cId="0" sldId="281"/>
+        </pc:sldMkLst>
+        <pc:spChg chg="mod">
+          <ac:chgData name="Dang Khoa Pham" userId="a0828928-506b-41e7-91fe-334565ca4eb5" providerId="ADAL" clId="{07F4103E-4D85-4DDD-92DF-5DC143FDFFF6}" dt="2026-07-26T11:42:18.012" v="358" actId="1076"/>
+          <ac:spMkLst>
+            <pc:docMk/>
+            <pc:sldMk cId="0" sldId="281"/>
+            <ac:spMk id="3" creationId="{00000000-0000-0000-0000-000000000000}"/>
+          </ac:spMkLst>
+        </pc:spChg>
+        <pc:spChg chg="mod">
+          <ac:chgData name="Dang Khoa Pham" userId="a0828928-506b-41e7-91fe-334565ca4eb5" providerId="ADAL" clId="{07F4103E-4D85-4DDD-92DF-5DC143FDFFF6}" dt="2026-07-26T11:42:06.924" v="356" actId="1076"/>
+          <ac:spMkLst>
+            <pc:docMk/>
+            <pc:sldMk cId="0" sldId="281"/>
+            <ac:spMk id="4" creationId="{00000000-0000-0000-0000-000000000000}"/>
+          </ac:spMkLst>
+        </pc:spChg>
+        <pc:spChg chg="mod">
+          <ac:chgData name="Dang Khoa Pham" userId="a0828928-506b-41e7-91fe-334565ca4eb5" providerId="ADAL" clId="{07F4103E-4D85-4DDD-92DF-5DC143FDFFF6}" dt="2026-07-26T11:42:06.924" v="356" actId="1076"/>
+          <ac:spMkLst>
+            <pc:docMk/>
+            <pc:sldMk cId="0" sldId="281"/>
+            <ac:spMk id="5" creationId="{00000000-0000-0000-0000-000000000000}"/>
+          </ac:spMkLst>
+        </pc:spChg>
+        <pc:spChg chg="mod">
+          <ac:chgData name="Dang Khoa Pham" userId="a0828928-506b-41e7-91fe-334565ca4eb5" providerId="ADAL" clId="{07F4103E-4D85-4DDD-92DF-5DC143FDFFF6}" dt="2026-07-26T11:41:30.771" v="352" actId="1076"/>
+          <ac:spMkLst>
+            <pc:docMk/>
+            <pc:sldMk cId="0" sldId="281"/>
+            <ac:spMk id="10" creationId="{00000000-0000-0000-0000-000000000000}"/>
+          </ac:spMkLst>
+        </pc:spChg>
+        <pc:spChg chg="mod">
+          <ac:chgData name="Dang Khoa Pham" userId="a0828928-506b-41e7-91fe-334565ca4eb5" providerId="ADAL" clId="{07F4103E-4D85-4DDD-92DF-5DC143FDFFF6}" dt="2026-07-26T11:41:30.771" v="352" actId="1076"/>
+          <ac:spMkLst>
+            <pc:docMk/>
+            <pc:sldMk cId="0" sldId="281"/>
+            <ac:spMk id="11" creationId="{00000000-0000-0000-0000-000000000000}"/>
+          </ac:spMkLst>
+        </pc:spChg>
+        <pc:spChg chg="mod">
+          <ac:chgData name="Dang Khoa Pham" userId="a0828928-506b-41e7-91fe-334565ca4eb5" providerId="ADAL" clId="{07F4103E-4D85-4DDD-92DF-5DC143FDFFF6}" dt="2026-07-26T11:41:30.771" v="352" actId="1076"/>
+          <ac:spMkLst>
+            <pc:docMk/>
+            <pc:sldMk cId="0" sldId="281"/>
+            <ac:spMk id="12" creationId="{00000000-0000-0000-0000-000000000000}"/>
+          </ac:spMkLst>
+        </pc:spChg>
+        <pc:spChg chg="mod">
+          <ac:chgData name="Dang Khoa Pham" userId="a0828928-506b-41e7-91fe-334565ca4eb5" providerId="ADAL" clId="{07F4103E-4D85-4DDD-92DF-5DC143FDFFF6}" dt="2026-07-26T11:41:30.771" v="352" actId="1076"/>
+          <ac:spMkLst>
+            <pc:docMk/>
+            <pc:sldMk cId="0" sldId="281"/>
+            <ac:spMk id="13" creationId="{00000000-0000-0000-0000-000000000000}"/>
+          </ac:spMkLst>
+        </pc:spChg>
+        <pc:spChg chg="mod">
+          <ac:chgData name="Dang Khoa Pham" userId="a0828928-506b-41e7-91fe-334565ca4eb5" providerId="ADAL" clId="{07F4103E-4D85-4DDD-92DF-5DC143FDFFF6}" dt="2026-07-26T11:41:47.042" v="354" actId="1076"/>
+          <ac:spMkLst>
+            <pc:docMk/>
+            <pc:sldMk cId="0" sldId="281"/>
+            <ac:spMk id="14" creationId="{00000000-0000-0000-0000-000000000000}"/>
+          </ac:spMkLst>
+        </pc:spChg>
+        <pc:spChg chg="mod">
+          <ac:chgData name="Dang Khoa Pham" userId="a0828928-506b-41e7-91fe-334565ca4eb5" providerId="ADAL" clId="{07F4103E-4D85-4DDD-92DF-5DC143FDFFF6}" dt="2026-07-26T11:41:47.042" v="354" actId="1076"/>
+          <ac:spMkLst>
+            <pc:docMk/>
+            <pc:sldMk cId="0" sldId="281"/>
+            <ac:spMk id="15" creationId="{00000000-0000-0000-0000-000000000000}"/>
+          </ac:spMkLst>
+        </pc:spChg>
+        <pc:spChg chg="mod">
+          <ac:chgData name="Dang Khoa Pham" userId="a0828928-506b-41e7-91fe-334565ca4eb5" providerId="ADAL" clId="{07F4103E-4D85-4DDD-92DF-5DC143FDFFF6}" dt="2026-07-26T11:42:32.898" v="359" actId="1076"/>
+          <ac:spMkLst>
+            <pc:docMk/>
+            <pc:sldMk cId="0" sldId="281"/>
+            <ac:spMk id="16" creationId="{00000000-0000-0000-0000-000000000000}"/>
+          </ac:spMkLst>
+        </pc:spChg>
+        <pc:spChg chg="mod">
+          <ac:chgData name="Dang Khoa Pham" userId="a0828928-506b-41e7-91fe-334565ca4eb5" providerId="ADAL" clId="{07F4103E-4D85-4DDD-92DF-5DC143FDFFF6}" dt="2026-07-26T11:41:39.074" v="353" actId="1076"/>
+          <ac:spMkLst>
+            <pc:docMk/>
+            <pc:sldMk cId="0" sldId="281"/>
+            <ac:spMk id="18" creationId="{00000000-0000-0000-0000-000000000000}"/>
+          </ac:spMkLst>
+        </pc:spChg>
+        <pc:spChg chg="mod">
+          <ac:chgData name="Dang Khoa Pham" userId="a0828928-506b-41e7-91fe-334565ca4eb5" providerId="ADAL" clId="{07F4103E-4D85-4DDD-92DF-5DC143FDFFF6}" dt="2026-07-26T11:41:30.771" v="352" actId="1076"/>
+          <ac:spMkLst>
+            <pc:docMk/>
+            <pc:sldMk cId="0" sldId="281"/>
+            <ac:spMk id="19" creationId="{00000000-0000-0000-0000-000000000000}"/>
+          </ac:spMkLst>
+        </pc:spChg>
+        <pc:spChg chg="mod">
+          <ac:chgData name="Dang Khoa Pham" userId="a0828928-506b-41e7-91fe-334565ca4eb5" providerId="ADAL" clId="{07F4103E-4D85-4DDD-92DF-5DC143FDFFF6}" dt="2026-07-26T11:41:57.299" v="355" actId="1076"/>
+          <ac:spMkLst>
+            <pc:docMk/>
+            <pc:sldMk cId="0" sldId="281"/>
+            <ac:spMk id="20" creationId="{00000000-0000-0000-0000-000000000000}"/>
           </ac:spMkLst>
         </pc:spChg>
       </pc:sldChg>
@@ -3729,8 +3927,8 @@
         </p:nvSpPr>
         <p:spPr>
           <a:xfrm>
-            <a:off x="585216" y="1321127"/>
-            <a:ext cx="5510784" cy="667875"/>
+            <a:off x="585216" y="1468859"/>
+            <a:ext cx="5510784" cy="372410"/>
           </a:xfrm>
           <a:prstGeom prst="rect">
             <a:avLst/>
@@ -3749,13 +3947,22 @@
               </a:lnSpc>
             </a:pPr>
             <a:r>
+              <a:rPr lang="en-US" sz="2000" b="0" dirty="0">
+                <a:solidFill>
+                  <a:srgbClr val="4B5563"/>
+                </a:solidFill>
+                <a:latin typeface="Aptos"/>
+              </a:rPr>
+              <a:t>2</a:t>
+            </a:r>
+            <a:r>
               <a:rPr sz="2000" b="0" dirty="0">
                 <a:solidFill>
                   <a:srgbClr val="4B5563"/>
                 </a:solidFill>
                 <a:latin typeface="Aptos"/>
               </a:rPr>
-              <a:t>4-hour practical workshop · no programming background required</a:t>
+              <a:t>-hour practical workshop</a:t>
             </a:r>
           </a:p>
         </p:txBody>
@@ -4396,226 +4603,6 @@
                 <a:latin typeface="Aptos"/>
               </a:rPr>
               <a:t>report</a:t>
-            </a:r>
-          </a:p>
-        </p:txBody>
-      </p:sp>
-      <p:sp>
-        <p:nvSpPr>
-          <p:cNvPr id="20" name="Rounded Rectangle 19"/>
-          <p:cNvSpPr/>
-          <p:nvPr/>
-        </p:nvSpPr>
-        <p:spPr>
-          <a:xfrm>
-            <a:off x="6766560" y="658368"/>
-            <a:ext cx="4800600" cy="1508760"/>
-          </a:xfrm>
-          <a:prstGeom prst="roundRect">
-            <a:avLst/>
-          </a:prstGeom>
-          <a:solidFill>
-            <a:srgbClr val="0F172A"/>
-          </a:solidFill>
-          <a:ln>
-            <a:solidFill>
-              <a:srgbClr val="0F172A"/>
-            </a:solidFill>
-          </a:ln>
-        </p:spPr>
-        <p:style>
-          <a:lnRef idx="1">
-            <a:schemeClr val="accent1"/>
-          </a:lnRef>
-          <a:fillRef idx="3">
-            <a:schemeClr val="accent1"/>
-          </a:fillRef>
-          <a:effectRef idx="2">
-            <a:schemeClr val="accent1"/>
-          </a:effectRef>
-          <a:fontRef idx="minor">
-            <a:schemeClr val="lt1"/>
-          </a:fontRef>
-        </p:style>
-        <p:txBody>
-          <a:bodyPr wrap="square" lIns="38100" tIns="38100" rIns="38100" bIns="38100" rtlCol="0" anchor="ctr"/>
-          <a:lstStyle/>
-          <a:p>
-            <a:pPr algn="ctr">
-              <a:lnSpc>
-                <a:spcPct val="96000"/>
-              </a:lnSpc>
-            </a:pPr>
-            <a:endParaRPr/>
-          </a:p>
-        </p:txBody>
-      </p:sp>
-      <p:sp>
-        <p:nvSpPr>
-          <p:cNvPr id="21" name="TextBox 20"/>
-          <p:cNvSpPr txBox="1"/>
-          <p:nvPr/>
-        </p:nvSpPr>
-        <p:spPr>
-          <a:xfrm>
-            <a:off x="6903720" y="786384"/>
-            <a:ext cx="4526280" cy="1280160"/>
-          </a:xfrm>
-          <a:prstGeom prst="rect">
-            <a:avLst/>
-          </a:prstGeom>
-          <a:noFill/>
-        </p:spPr>
-        <p:txBody>
-          <a:bodyPr wrap="square" lIns="25400" tIns="25400" rIns="25400" bIns="25400" anchor="t">
-            <a:spAutoFit/>
-          </a:bodyPr>
-          <a:lstStyle/>
-          <a:p>
-            <a:pPr algn="l">
-              <a:lnSpc>
-                <a:spcPct val="86000"/>
-              </a:lnSpc>
-            </a:pPr>
-            <a:r>
-              <a:rPr sz="1800" b="0">
-                <a:solidFill>
-                  <a:srgbClr val="F8FAFC"/>
-                </a:solidFill>
-                <a:latin typeface="Cascadia Mono"/>
-              </a:rPr>
-              <a:t># Python reads like small work steps
-student_name = "Maya"
-score = 72
-print("Can pass:", score &gt;= 50)</a:t>
-            </a:r>
-          </a:p>
-        </p:txBody>
-      </p:sp>
-      <p:sp>
-        <p:nvSpPr>
-          <p:cNvPr id="22" name="Rounded Rectangle 21"/>
-          <p:cNvSpPr/>
-          <p:nvPr/>
-        </p:nvSpPr>
-        <p:spPr>
-          <a:xfrm>
-            <a:off x="6766560" y="2514600"/>
-            <a:ext cx="4800600" cy="1261872"/>
-          </a:xfrm>
-          <a:prstGeom prst="roundRect">
-            <a:avLst/>
-          </a:prstGeom>
-          <a:solidFill>
-            <a:srgbClr val="DCFCE7"/>
-          </a:solidFill>
-          <a:ln>
-            <a:solidFill>
-              <a:srgbClr val="DCFCE7"/>
-            </a:solidFill>
-          </a:ln>
-        </p:spPr>
-        <p:style>
-          <a:lnRef idx="1">
-            <a:schemeClr val="accent1"/>
-          </a:lnRef>
-          <a:fillRef idx="3">
-            <a:schemeClr val="accent1"/>
-          </a:fillRef>
-          <a:effectRef idx="2">
-            <a:schemeClr val="accent1"/>
-          </a:effectRef>
-          <a:fontRef idx="minor">
-            <a:schemeClr val="lt1"/>
-          </a:fontRef>
-        </p:style>
-        <p:txBody>
-          <a:bodyPr wrap="square" lIns="38100" tIns="38100" rIns="38100" bIns="38100" rtlCol="0" anchor="ctr"/>
-          <a:lstStyle/>
-          <a:p>
-            <a:pPr algn="ctr">
-              <a:lnSpc>
-                <a:spcPct val="96000"/>
-              </a:lnSpc>
-            </a:pPr>
-            <a:endParaRPr/>
-          </a:p>
-        </p:txBody>
-      </p:sp>
-      <p:sp>
-        <p:nvSpPr>
-          <p:cNvPr id="23" name="TextBox 22"/>
-          <p:cNvSpPr txBox="1"/>
-          <p:nvPr/>
-        </p:nvSpPr>
-        <p:spPr>
-          <a:xfrm>
-            <a:off x="6995160" y="2743200"/>
-            <a:ext cx="2194560" cy="274320"/>
-          </a:xfrm>
-          <a:prstGeom prst="rect">
-            <a:avLst/>
-          </a:prstGeom>
-          <a:noFill/>
-        </p:spPr>
-        <p:txBody>
-          <a:bodyPr wrap="square" lIns="38100" tIns="38100" rIns="38100" bIns="38100" anchor="ctr">
-            <a:spAutoFit/>
-          </a:bodyPr>
-          <a:lstStyle/>
-          <a:p>
-            <a:pPr algn="l">
-              <a:lnSpc>
-                <a:spcPct val="96000"/>
-              </a:lnSpc>
-            </a:pPr>
-            <a:r>
-              <a:rPr sz="2000" b="1">
-                <a:solidFill>
-                  <a:srgbClr val="166534"/>
-                </a:solidFill>
-                <a:latin typeface="Aptos"/>
-              </a:rPr>
-              <a:t>Workshop promise</a:t>
-            </a:r>
-          </a:p>
-        </p:txBody>
-      </p:sp>
-      <p:sp>
-        <p:nvSpPr>
-          <p:cNvPr id="24" name="TextBox 23"/>
-          <p:cNvSpPr txBox="1"/>
-          <p:nvPr/>
-        </p:nvSpPr>
-        <p:spPr>
-          <a:xfrm>
-            <a:off x="6995160" y="3108960"/>
-            <a:ext cx="4251960" cy="420624"/>
-          </a:xfrm>
-          <a:prstGeom prst="rect">
-            <a:avLst/>
-          </a:prstGeom>
-          <a:noFill/>
-        </p:spPr>
-        <p:txBody>
-          <a:bodyPr wrap="square" lIns="25400" tIns="25400" rIns="25400" bIns="25400" anchor="t">
-            <a:spAutoFit/>
-          </a:bodyPr>
-          <a:lstStyle/>
-          <a:p>
-            <a:pPr algn="l">
-              <a:lnSpc>
-                <a:spcPct val="86000"/>
-              </a:lnSpc>
-            </a:pPr>
-            <a:r>
-              <a:rPr sz="1700" b="0">
-                <a:solidFill>
-                  <a:srgbClr val="111827"/>
-                </a:solidFill>
-                <a:latin typeface="Aptos"/>
-              </a:rPr>
-              <a:t>Learn the useful 20% of Python that gives 80% practical value for study, work and beginner data tasks.</a:t>
             </a:r>
           </a:p>
         </p:txBody>
@@ -5369,7 +5356,7 @@
         </p:nvSpPr>
         <p:spPr>
           <a:xfrm>
-            <a:off x="3429000" y="6291072"/>
+            <a:off x="3429000" y="5745390"/>
             <a:ext cx="5303520" cy="182880"/>
           </a:xfrm>
           <a:prstGeom prst="rect">
@@ -5389,7 +5376,7 @@
               </a:lnSpc>
             </a:pPr>
             <a:r>
-              <a:rPr sz="1520" b="1">
+              <a:rPr sz="1520" b="1" dirty="0">
                 <a:solidFill>
                   <a:srgbClr val="4B5563"/>
                 </a:solidFill>
@@ -5588,6 +5575,57 @@
               </a:rPr>
               <a:t>keep it beginner-friendly and learn the useful basics first — enough to start self-learning and reading real code.</a:t>
             </a:r>
+          </a:p>
+        </p:txBody>
+      </p:sp>
+      <p:sp>
+        <p:nvSpPr>
+          <p:cNvPr id="48" name="TextBox 47">
+            <a:extLst>
+              <a:ext uri="{FF2B5EF4-FFF2-40B4-BE49-F238E27FC236}">
+                <a16:creationId xmlns:a16="http://schemas.microsoft.com/office/drawing/2014/main" id="{4B322294-D7B6-BFDC-5E53-6A3DFFD4E775}"/>
+              </a:ext>
+            </a:extLst>
+          </p:cNvPr>
+          <p:cNvSpPr txBox="1"/>
+          <p:nvPr/>
+        </p:nvSpPr>
+        <p:spPr>
+          <a:xfrm>
+            <a:off x="3429000" y="6204333"/>
+            <a:ext cx="5303520" cy="301493"/>
+          </a:xfrm>
+          <a:prstGeom prst="rect">
+            <a:avLst/>
+          </a:prstGeom>
+          <a:noFill/>
+        </p:spPr>
+        <p:txBody>
+          <a:bodyPr wrap="square" lIns="38100" tIns="38100" rIns="38100" bIns="38100" anchor="ctr">
+            <a:spAutoFit/>
+          </a:bodyPr>
+          <a:lstStyle/>
+          <a:p>
+            <a:pPr algn="ctr">
+              <a:lnSpc>
+                <a:spcPct val="96000"/>
+              </a:lnSpc>
+            </a:pPr>
+            <a:r>
+              <a:rPr lang="en-US" sz="1520" b="1" dirty="0">
+                <a:solidFill>
+                  <a:srgbClr val="4B5563"/>
+                </a:solidFill>
+                <a:latin typeface="Aptos"/>
+              </a:rPr>
+              <a:t>Kevin Pham - 390791</a:t>
+            </a:r>
+            <a:endParaRPr sz="1520" b="1" dirty="0">
+              <a:solidFill>
+                <a:srgbClr val="4B5563"/>
+              </a:solidFill>
+              <a:latin typeface="Aptos"/>
+            </a:endParaRPr>
           </a:p>
         </p:txBody>
       </p:sp>
@@ -15615,8 +15653,8 @@
         </p:nvSpPr>
         <p:spPr>
           <a:xfrm>
-            <a:off x="1097280" y="4169663"/>
-            <a:ext cx="2103120" cy="228600"/>
+            <a:off x="1097280" y="4097758"/>
+            <a:ext cx="2801860" cy="372410"/>
           </a:xfrm>
           <a:prstGeom prst="rect">
             <a:avLst/>
@@ -15635,7 +15673,7 @@
               </a:lnSpc>
             </a:pPr>
             <a:r>
-              <a:rPr sz="2000" b="1">
+              <a:rPr sz="2000" b="1" dirty="0">
                 <a:solidFill>
                   <a:srgbClr val="166534"/>
                 </a:solidFill>
@@ -15743,8 +15781,8 @@
         </p:nvSpPr>
         <p:spPr>
           <a:xfrm>
-            <a:off x="6720840" y="4169663"/>
-            <a:ext cx="2377440" cy="228600"/>
+            <a:off x="6720839" y="4097758"/>
+            <a:ext cx="2788919" cy="372410"/>
           </a:xfrm>
           <a:prstGeom prst="rect">
             <a:avLst/>
@@ -15763,7 +15801,7 @@
               </a:lnSpc>
             </a:pPr>
             <a:r>
-              <a:rPr sz="2000" b="1">
+              <a:rPr sz="2000" b="1" dirty="0">
                 <a:solidFill>
                   <a:srgbClr val="1D4ED8"/>
                 </a:solidFill>
@@ -17891,7 +17929,7 @@
         </p:spPr>
         <p:txBody>
           <a:bodyPr wrap="square" lIns="38100" tIns="38100" rIns="38100" bIns="38100" rtlCol="0" anchor="ctr">
-            <a:normAutofit fontScale="85000" lnSpcReduction="20000"/>
+            <a:noAutofit/>
           </a:bodyPr>
           <a:lstStyle/>
           <a:p>
@@ -17909,7 +17947,7 @@
               </a:rPr>
               <a:t>When to use</a:t>
             </a:r>
-            <a:endParaRPr lang="en-US" sz="1800" dirty="0"/>
+            <a:endParaRPr lang="en-US" sz="2000" dirty="0"/>
           </a:p>
         </p:txBody>
       </p:sp>
@@ -18145,7 +18183,7 @@
         </p:spPr>
         <p:txBody>
           <a:bodyPr wrap="square" lIns="38100" tIns="38100" rIns="38100" bIns="38100" rtlCol="0" anchor="ctr">
-            <a:normAutofit fontScale="85000" lnSpcReduction="20000"/>
+            <a:noAutofit/>
           </a:bodyPr>
           <a:lstStyle/>
           <a:p>
@@ -18156,14 +18194,14 @@
               <a:buNone/>
             </a:pPr>
             <a:r>
-              <a:rPr lang="en-US" sz="2000" b="1" dirty="0">
+              <a:rPr lang="en-US" b="1" dirty="0">
                 <a:solidFill>
                   <a:srgbClr val="059669"/>
                 </a:solidFill>
               </a:rPr>
               <a:t>Workshop priority</a:t>
             </a:r>
-            <a:endParaRPr lang="en-US" sz="1800" dirty="0"/>
+            <a:endParaRPr lang="en-US" dirty="0"/>
           </a:p>
         </p:txBody>
       </p:sp>
@@ -18732,7 +18770,7 @@
         </p:spPr>
         <p:txBody>
           <a:bodyPr wrap="square" lIns="38100" tIns="38100" rIns="38100" bIns="38100" rtlCol="0" anchor="ctr">
-            <a:normAutofit fontScale="55000" lnSpcReduction="20000"/>
+            <a:normAutofit/>
           </a:bodyPr>
           <a:lstStyle/>
           <a:p>
@@ -18743,14 +18781,14 @@
               <a:buNone/>
             </a:pPr>
             <a:r>
-              <a:rPr lang="en-US" sz="2000" b="1" dirty="0">
+              <a:rPr lang="en-US" sz="1200" b="1" dirty="0">
                 <a:solidFill>
                   <a:srgbClr val="2563EB"/>
                 </a:solidFill>
               </a:rPr>
               <a:t>Input → Function → Output</a:t>
             </a:r>
-            <a:endParaRPr lang="en-US" sz="1800" dirty="0"/>
+            <a:endParaRPr lang="en-US" sz="1100" dirty="0"/>
           </a:p>
         </p:txBody>
       </p:sp>
@@ -21289,7 +21327,7 @@
         </p:nvSpPr>
         <p:spPr>
           <a:xfrm>
-            <a:off x="685800" y="987552"/>
+            <a:off x="577970" y="960810"/>
             <a:ext cx="1051560" cy="347472"/>
           </a:xfrm>
           <a:prstGeom prst="roundRect">
@@ -21333,7 +21371,7 @@
         </p:nvSpPr>
         <p:spPr>
           <a:xfrm>
-            <a:off x="731520" y="1042416"/>
+            <a:off x="623690" y="1015674"/>
             <a:ext cx="960119" cy="219456"/>
           </a:xfrm>
           <a:prstGeom prst="rect">
@@ -21526,7 +21564,7 @@
         </p:nvSpPr>
         <p:spPr>
           <a:xfrm>
-            <a:off x="4617720" y="987552"/>
+            <a:off x="4954151" y="987552"/>
             <a:ext cx="1417320" cy="347472"/>
           </a:xfrm>
           <a:prstGeom prst="roundRect">
@@ -21570,7 +21608,7 @@
         </p:nvSpPr>
         <p:spPr>
           <a:xfrm>
-            <a:off x="4663440" y="1042416"/>
+            <a:off x="4999871" y="1042416"/>
             <a:ext cx="1325880" cy="219456"/>
           </a:xfrm>
           <a:prstGeom prst="rect">
@@ -21605,7 +21643,7 @@
         </p:nvSpPr>
         <p:spPr>
           <a:xfrm>
-            <a:off x="6355080" y="987552"/>
+            <a:off x="6691511" y="987552"/>
             <a:ext cx="1051560" cy="347472"/>
           </a:xfrm>
           <a:prstGeom prst="roundRect">
@@ -21649,7 +21687,7 @@
         </p:nvSpPr>
         <p:spPr>
           <a:xfrm>
-            <a:off x="6400800" y="1042416"/>
+            <a:off x="6737231" y="1042416"/>
             <a:ext cx="960119" cy="219456"/>
           </a:xfrm>
           <a:prstGeom prst="rect">
@@ -21684,7 +21722,7 @@
         </p:nvSpPr>
         <p:spPr>
           <a:xfrm>
-            <a:off x="7452360" y="987552"/>
+            <a:off x="8177411" y="987552"/>
             <a:ext cx="1051560" cy="347472"/>
           </a:xfrm>
           <a:prstGeom prst="roundRect">
@@ -21728,7 +21766,7 @@
         </p:nvSpPr>
         <p:spPr>
           <a:xfrm>
-            <a:off x="7498080" y="1042416"/>
+            <a:off x="8223131" y="1042416"/>
             <a:ext cx="960119" cy="219456"/>
           </a:xfrm>
           <a:prstGeom prst="rect">
@@ -21763,7 +21801,7 @@
         </p:nvSpPr>
         <p:spPr>
           <a:xfrm>
-            <a:off x="1764792" y="1024128"/>
+            <a:off x="1676328" y="996869"/>
             <a:ext cx="228600" cy="219456"/>
           </a:xfrm>
           <a:prstGeom prst="rect">
@@ -21779,7 +21817,7 @@
           <a:p>
             <a:pPr algn="ctr"/>
             <a:r>
-              <a:rPr sz="1500" b="1">
+              <a:rPr sz="1500" b="1" dirty="0">
                 <a:solidFill>
                   <a:srgbClr val="525F73"/>
                 </a:solidFill>
@@ -21833,7 +21871,7 @@
         </p:nvSpPr>
         <p:spPr>
           <a:xfrm>
-            <a:off x="4343400" y="1024128"/>
+            <a:off x="4647480" y="1042416"/>
             <a:ext cx="228600" cy="219456"/>
           </a:xfrm>
           <a:prstGeom prst="rect">
@@ -21849,7 +21887,7 @@
           <a:p>
             <a:pPr algn="ctr"/>
             <a:r>
-              <a:rPr sz="1500" b="1">
+              <a:rPr sz="1500" b="1" dirty="0">
                 <a:solidFill>
                   <a:srgbClr val="525F73"/>
                 </a:solidFill>
@@ -21868,7 +21906,7 @@
         </p:nvSpPr>
         <p:spPr>
           <a:xfrm>
-            <a:off x="6080760" y="1024128"/>
+            <a:off x="6417191" y="1024128"/>
             <a:ext cx="228600" cy="219456"/>
           </a:xfrm>
           <a:prstGeom prst="rect">
@@ -21903,7 +21941,7 @@
         </p:nvSpPr>
         <p:spPr>
           <a:xfrm>
-            <a:off x="7269480" y="1024128"/>
+            <a:off x="7865135" y="1015674"/>
             <a:ext cx="228600" cy="219456"/>
           </a:xfrm>
           <a:prstGeom prst="rect">
@@ -21919,7 +21957,7 @@
           <a:p>
             <a:pPr algn="ctr"/>
             <a:r>
-              <a:rPr sz="1500" b="1">
+              <a:rPr sz="1500" b="1" dirty="0">
                 <a:solidFill>
                   <a:srgbClr val="525F73"/>
                 </a:solidFill>
@@ -27537,8 +27575,8 @@
         </p:nvSpPr>
         <p:spPr>
           <a:xfrm>
-            <a:off x="5120640" y="1298448"/>
-            <a:ext cx="2606040" cy="256032"/>
+            <a:off x="5120640" y="1252827"/>
+            <a:ext cx="2834640" cy="347275"/>
           </a:xfrm>
           <a:prstGeom prst="rect">
             <a:avLst/>
@@ -27557,7 +27595,7 @@
               </a:lnSpc>
             </a:pPr>
             <a:r>
-              <a:rPr sz="1830" b="1">
+              <a:rPr sz="1830" b="1" dirty="0">
                 <a:solidFill>
                   <a:srgbClr val="166534"/>
                 </a:solidFill>

--- a/CDU_Python_Beginner_Workshop_Section1.pptx
+++ b/CDU_Python_Beginner_Workshop_Section1.pptx
@@ -14,7 +14,7 @@
     <p:sldId id="259" r:id="rId5"/>
     <p:sldId id="260" r:id="rId6"/>
     <p:sldId id="261" r:id="rId7"/>
-    <p:sldId id="262" r:id="rId8"/>
+    <p:sldId id="284" r:id="rId8"/>
     <p:sldId id="263" r:id="rId9"/>
     <p:sldId id="264" r:id="rId10"/>
     <p:sldId id="265" r:id="rId11"/>
@@ -142,7 +142,7 @@
 <file path=ppt/revisionInfo.xml><?xml version="1.0" encoding="utf-8"?>
 <p1510:revInfo xmlns:a="http://schemas.openxmlformats.org/drawingml/2006/main" xmlns:r="http://schemas.openxmlformats.org/officeDocument/2006/relationships" xmlns:p1510="http://schemas.microsoft.com/office/powerpoint/2015/10/main">
   <p1510:revLst>
-    <p1510:client id="{8EF796D6-BA51-46C4-85A0-21C3E8FFDC83}" v="1" dt="2026-07-26T01:14:59.533"/>
+    <p1510:client id="{8EF796D6-BA51-46C4-85A0-21C3E8FFDC83}" v="4" dt="2026-07-27T02:46:09.520"/>
   </p1510:revLst>
 </p1510:revInfo>
 </file>
@@ -151,8 +151,8 @@
 <pc:chgInfo xmlns:a="http://schemas.openxmlformats.org/drawingml/2006/main" xmlns:r="http://schemas.openxmlformats.org/officeDocument/2006/relationships" xmlns:ac="http://schemas.microsoft.com/office/drawing/2013/main/command" xmlns:pc="http://schemas.microsoft.com/office/powerpoint/2013/main/command">
   <pc:docChgLst>
     <pc:chgData name="Dang Khoa Pham" userId="a0828928-506b-41e7-91fe-334565ca4eb5" providerId="ADAL" clId="{07F4103E-4D85-4DDD-92DF-5DC143FDFFF6}"/>
-    <pc:docChg chg="undo custSel modSld modShowInfo">
-      <pc:chgData name="Dang Khoa Pham" userId="a0828928-506b-41e7-91fe-334565ca4eb5" providerId="ADAL" clId="{07F4103E-4D85-4DDD-92DF-5DC143FDFFF6}" dt="2026-07-26T11:42:32.898" v="359" actId="1076"/>
+    <pc:docChg chg="undo custSel addSld delSld modSld modShowInfo">
+      <pc:chgData name="Dang Khoa Pham" userId="a0828928-506b-41e7-91fe-334565ca4eb5" providerId="ADAL" clId="{07F4103E-4D85-4DDD-92DF-5DC143FDFFF6}" dt="2026-07-27T02:48:09.217" v="383" actId="14100"/>
       <pc:docMkLst>
         <pc:docMk/>
       </pc:docMkLst>
@@ -519,8 +519,31 @@
           </ac:spMkLst>
         </pc:spChg>
       </pc:sldChg>
-      <pc:sldChg chg="addSp modSp mod">
-        <pc:chgData name="Dang Khoa Pham" userId="a0828928-506b-41e7-91fe-334565ca4eb5" providerId="ADAL" clId="{07F4103E-4D85-4DDD-92DF-5DC143FDFFF6}" dt="2026-07-26T11:31:31.984" v="248" actId="1076"/>
+      <pc:sldChg chg="modSp mod">
+        <pc:chgData name="Dang Khoa Pham" userId="a0828928-506b-41e7-91fe-334565ca4eb5" providerId="ADAL" clId="{07F4103E-4D85-4DDD-92DF-5DC143FDFFF6}" dt="2026-07-27T02:48:09.217" v="383" actId="14100"/>
+        <pc:sldMkLst>
+          <pc:docMk/>
+          <pc:sldMk cId="0" sldId="261"/>
+        </pc:sldMkLst>
+        <pc:spChg chg="mod">
+          <ac:chgData name="Dang Khoa Pham" userId="a0828928-506b-41e7-91fe-334565ca4eb5" providerId="ADAL" clId="{07F4103E-4D85-4DDD-92DF-5DC143FDFFF6}" dt="2026-07-27T02:48:09.217" v="383" actId="14100"/>
+          <ac:spMkLst>
+            <pc:docMk/>
+            <pc:sldMk cId="0" sldId="261"/>
+            <ac:spMk id="10" creationId="{00000000-0000-0000-0000-000000000000}"/>
+          </ac:spMkLst>
+        </pc:spChg>
+        <pc:spChg chg="mod">
+          <ac:chgData name="Dang Khoa Pham" userId="a0828928-506b-41e7-91fe-334565ca4eb5" providerId="ADAL" clId="{07F4103E-4D85-4DDD-92DF-5DC143FDFFF6}" dt="2026-07-27T02:48:06.890" v="382" actId="14100"/>
+          <ac:spMkLst>
+            <pc:docMk/>
+            <pc:sldMk cId="0" sldId="261"/>
+            <ac:spMk id="12" creationId="{00000000-0000-0000-0000-000000000000}"/>
+          </ac:spMkLst>
+        </pc:spChg>
+      </pc:sldChg>
+      <pc:sldChg chg="addSp modSp del mod">
+        <pc:chgData name="Dang Khoa Pham" userId="a0828928-506b-41e7-91fe-334565ca4eb5" providerId="ADAL" clId="{07F4103E-4D85-4DDD-92DF-5DC143FDFFF6}" dt="2026-07-27T02:47:43.955" v="381" actId="47"/>
         <pc:sldMkLst>
           <pc:docMk/>
           <pc:sldMk cId="0" sldId="262"/>
@@ -816,7 +839,7 @@
         </pc:spChg>
       </pc:sldChg>
       <pc:sldChg chg="modSp mod">
-        <pc:chgData name="Dang Khoa Pham" userId="a0828928-506b-41e7-91fe-334565ca4eb5" providerId="ADAL" clId="{07F4103E-4D85-4DDD-92DF-5DC143FDFFF6}" dt="2026-07-26T01:14:59.878" v="49" actId="27636"/>
+        <pc:chgData name="Dang Khoa Pham" userId="a0828928-506b-41e7-91fe-334565ca4eb5" providerId="ADAL" clId="{07F4103E-4D85-4DDD-92DF-5DC143FDFFF6}" dt="2026-07-27T02:45:16.518" v="361" actId="27636"/>
         <pc:sldMkLst>
           <pc:docMk/>
           <pc:sldMk cId="0" sldId="275"/>
@@ -854,7 +877,7 @@
           </ac:spMkLst>
         </pc:spChg>
         <pc:spChg chg="mod">
-          <ac:chgData name="Dang Khoa Pham" userId="a0828928-506b-41e7-91fe-334565ca4eb5" providerId="ADAL" clId="{07F4103E-4D85-4DDD-92DF-5DC143FDFFF6}" dt="2026-07-26T01:14:59.878" v="48" actId="27636"/>
+          <ac:chgData name="Dang Khoa Pham" userId="a0828928-506b-41e7-91fe-334565ca4eb5" providerId="ADAL" clId="{07F4103E-4D85-4DDD-92DF-5DC143FDFFF6}" dt="2026-07-27T02:45:16.518" v="361" actId="27636"/>
           <ac:spMkLst>
             <pc:docMk/>
             <pc:sldMk cId="0" sldId="275"/>
@@ -902,7 +925,7 @@
         </pc:spChg>
       </pc:sldChg>
       <pc:sldChg chg="modSp mod">
-        <pc:chgData name="Dang Khoa Pham" userId="a0828928-506b-41e7-91fe-334565ca4eb5" providerId="ADAL" clId="{07F4103E-4D85-4DDD-92DF-5DC143FDFFF6}" dt="2026-07-26T11:40:36.104" v="324" actId="404"/>
+        <pc:chgData name="Dang Khoa Pham" userId="a0828928-506b-41e7-91fe-334565ca4eb5" providerId="ADAL" clId="{07F4103E-4D85-4DDD-92DF-5DC143FDFFF6}" dt="2026-07-27T02:45:16.633" v="362" actId="27636"/>
         <pc:sldMkLst>
           <pc:docMk/>
           <pc:sldMk cId="0" sldId="277"/>
@@ -924,7 +947,7 @@
           </ac:spMkLst>
         </pc:spChg>
         <pc:spChg chg="mod">
-          <ac:chgData name="Dang Khoa Pham" userId="a0828928-506b-41e7-91fe-334565ca4eb5" providerId="ADAL" clId="{07F4103E-4D85-4DDD-92DF-5DC143FDFFF6}" dt="2026-07-26T01:14:59.925" v="57" actId="27636"/>
+          <ac:chgData name="Dang Khoa Pham" userId="a0828928-506b-41e7-91fe-334565ca4eb5" providerId="ADAL" clId="{07F4103E-4D85-4DDD-92DF-5DC143FDFFF6}" dt="2026-07-27T02:45:16.633" v="362" actId="27636"/>
           <ac:spMkLst>
             <pc:docMk/>
             <pc:sldMk cId="0" sldId="277"/>
@@ -1012,7 +1035,7 @@
         </pc:spChg>
       </pc:sldChg>
       <pc:sldChg chg="modSp mod">
-        <pc:chgData name="Dang Khoa Pham" userId="a0828928-506b-41e7-91fe-334565ca4eb5" providerId="ADAL" clId="{07F4103E-4D85-4DDD-92DF-5DC143FDFFF6}" dt="2026-07-26T01:15:00.068" v="72" actId="27636"/>
+        <pc:chgData name="Dang Khoa Pham" userId="a0828928-506b-41e7-91fe-334565ca4eb5" providerId="ADAL" clId="{07F4103E-4D85-4DDD-92DF-5DC143FDFFF6}" dt="2026-07-27T02:45:16.677" v="363" actId="27636"/>
         <pc:sldMkLst>
           <pc:docMk/>
           <pc:sldMk cId="0" sldId="279"/>
@@ -1026,7 +1049,7 @@
           </ac:spMkLst>
         </pc:spChg>
         <pc:spChg chg="mod">
-          <ac:chgData name="Dang Khoa Pham" userId="a0828928-506b-41e7-91fe-334565ca4eb5" providerId="ADAL" clId="{07F4103E-4D85-4DDD-92DF-5DC143FDFFF6}" dt="2026-07-26T01:15:00.020" v="67" actId="27636"/>
+          <ac:chgData name="Dang Khoa Pham" userId="a0828928-506b-41e7-91fe-334565ca4eb5" providerId="ADAL" clId="{07F4103E-4D85-4DDD-92DF-5DC143FDFFF6}" dt="2026-07-27T02:45:16.677" v="363" actId="27636"/>
           <ac:spMkLst>
             <pc:docMk/>
             <pc:sldMk cId="0" sldId="279"/>
@@ -1237,6 +1260,77 @@
             <pc:docMk/>
             <pc:sldMk cId="0" sldId="281"/>
             <ac:spMk id="20" creationId="{00000000-0000-0000-0000-000000000000}"/>
+          </ac:spMkLst>
+        </pc:spChg>
+      </pc:sldChg>
+      <pc:sldChg chg="addSp modSp add mod setBg">
+        <pc:chgData name="Dang Khoa Pham" userId="a0828928-506b-41e7-91fe-334565ca4eb5" providerId="ADAL" clId="{07F4103E-4D85-4DDD-92DF-5DC143FDFFF6}" dt="2026-07-27T02:47:11.688" v="380" actId="1076"/>
+        <pc:sldMkLst>
+          <pc:docMk/>
+          <pc:sldMk cId="0" sldId="284"/>
+        </pc:sldMkLst>
+        <pc:spChg chg="mod">
+          <ac:chgData name="Dang Khoa Pham" userId="a0828928-506b-41e7-91fe-334565ca4eb5" providerId="ADAL" clId="{07F4103E-4D85-4DDD-92DF-5DC143FDFFF6}" dt="2026-07-27T02:46:08.365" v="372" actId="1076"/>
+          <ac:spMkLst>
+            <pc:docMk/>
+            <pc:sldMk cId="0" sldId="284"/>
+            <ac:spMk id="7" creationId="{00000000-0000-0000-0000-000000000000}"/>
+          </ac:spMkLst>
+        </pc:spChg>
+        <pc:spChg chg="mod">
+          <ac:chgData name="Dang Khoa Pham" userId="a0828928-506b-41e7-91fe-334565ca4eb5" providerId="ADAL" clId="{07F4103E-4D85-4DDD-92DF-5DC143FDFFF6}" dt="2026-07-27T02:45:58.960" v="369" actId="14100"/>
+          <ac:spMkLst>
+            <pc:docMk/>
+            <pc:sldMk cId="0" sldId="284"/>
+            <ac:spMk id="8" creationId="{00000000-0000-0000-0000-000000000000}"/>
+          </ac:spMkLst>
+        </pc:spChg>
+        <pc:spChg chg="mod">
+          <ac:chgData name="Dang Khoa Pham" userId="a0828928-506b-41e7-91fe-334565ca4eb5" providerId="ADAL" clId="{07F4103E-4D85-4DDD-92DF-5DC143FDFFF6}" dt="2026-07-27T02:45:54.089" v="368" actId="1076"/>
+          <ac:spMkLst>
+            <pc:docMk/>
+            <pc:sldMk cId="0" sldId="284"/>
+            <ac:spMk id="9" creationId="{00000000-0000-0000-0000-000000000000}"/>
+          </ac:spMkLst>
+        </pc:spChg>
+        <pc:spChg chg="mod">
+          <ac:chgData name="Dang Khoa Pham" userId="a0828928-506b-41e7-91fe-334565ca4eb5" providerId="ADAL" clId="{07F4103E-4D85-4DDD-92DF-5DC143FDFFF6}" dt="2026-07-27T02:45:54.089" v="368" actId="1076"/>
+          <ac:spMkLst>
+            <pc:docMk/>
+            <pc:sldMk cId="0" sldId="284"/>
+            <ac:spMk id="10" creationId="{00000000-0000-0000-0000-000000000000}"/>
+          </ac:spMkLst>
+        </pc:spChg>
+        <pc:spChg chg="add mod">
+          <ac:chgData name="Dang Khoa Pham" userId="a0828928-506b-41e7-91fe-334565ca4eb5" providerId="ADAL" clId="{07F4103E-4D85-4DDD-92DF-5DC143FDFFF6}" dt="2026-07-27T02:46:24.040" v="376" actId="1076"/>
+          <ac:spMkLst>
+            <pc:docMk/>
+            <pc:sldMk cId="0" sldId="284"/>
+            <ac:spMk id="19" creationId="{48F72B34-7D5A-5DEF-7C1D-267016142B55}"/>
+          </ac:spMkLst>
+        </pc:spChg>
+        <pc:spChg chg="add mod">
+          <ac:chgData name="Dang Khoa Pham" userId="a0828928-506b-41e7-91fe-334565ca4eb5" providerId="ADAL" clId="{07F4103E-4D85-4DDD-92DF-5DC143FDFFF6}" dt="2026-07-27T02:47:02.923" v="378" actId="1076"/>
+          <ac:spMkLst>
+            <pc:docMk/>
+            <pc:sldMk cId="0" sldId="284"/>
+            <ac:spMk id="23" creationId="{569D4601-CDCF-78E1-188A-0F65268AB4F4}"/>
+          </ac:spMkLst>
+        </pc:spChg>
+        <pc:spChg chg="add mod">
+          <ac:chgData name="Dang Khoa Pham" userId="a0828928-506b-41e7-91fe-334565ca4eb5" providerId="ADAL" clId="{07F4103E-4D85-4DDD-92DF-5DC143FDFFF6}" dt="2026-07-27T02:47:11.688" v="380" actId="1076"/>
+          <ac:spMkLst>
+            <pc:docMk/>
+            <pc:sldMk cId="0" sldId="284"/>
+            <ac:spMk id="25" creationId="{0CE978D4-E192-AE30-D6C6-CAEC4AB10673}"/>
+          </ac:spMkLst>
+        </pc:spChg>
+        <pc:spChg chg="add mod">
+          <ac:chgData name="Dang Khoa Pham" userId="a0828928-506b-41e7-91fe-334565ca4eb5" providerId="ADAL" clId="{07F4103E-4D85-4DDD-92DF-5DC143FDFFF6}" dt="2026-07-27T02:47:08.141" v="379" actId="1076"/>
+          <ac:spMkLst>
+            <pc:docMk/>
+            <pc:sldMk cId="0" sldId="284"/>
+            <ac:spMk id="27" creationId="{69F8C5A1-6905-BD59-1B70-917A31D7AAFE}"/>
           </ac:spMkLst>
         </pc:spChg>
       </pc:sldChg>
@@ -16740,7 +16834,7 @@
         </p:spPr>
         <p:txBody>
           <a:bodyPr wrap="square" lIns="25400" tIns="25400" rIns="25400" bIns="25400" rtlCol="0" anchor="ctr">
-            <a:normAutofit fontScale="85000" lnSpcReduction="10000"/>
+            <a:normAutofit fontScale="77500" lnSpcReduction="20000"/>
           </a:bodyPr>
           <a:lstStyle/>
           <a:p>
@@ -18096,7 +18190,7 @@
         </p:spPr>
         <p:txBody>
           <a:bodyPr wrap="square" lIns="38100" tIns="38100" rIns="38100" bIns="38100" rtlCol="0" anchor="t">
-            <a:normAutofit fontScale="62500" lnSpcReduction="20000"/>
+            <a:normAutofit fontScale="55000" lnSpcReduction="20000"/>
           </a:bodyPr>
           <a:lstStyle/>
           <a:p>
@@ -19642,7 +19736,7 @@
         </p:spPr>
         <p:txBody>
           <a:bodyPr wrap="square" lIns="38100" tIns="38100" rIns="38100" bIns="38100" rtlCol="0" anchor="ctr">
-            <a:normAutofit fontScale="85000" lnSpcReduction="10000"/>
+            <a:normAutofit fontScale="77500" lnSpcReduction="20000"/>
           </a:bodyPr>
           <a:lstStyle/>
           <a:p>
@@ -28667,7 +28761,7 @@
         <p:spPr>
           <a:xfrm>
             <a:off x="822960" y="3749039"/>
-            <a:ext cx="3108960" cy="914400"/>
+            <a:ext cx="3395356" cy="914400"/>
           </a:xfrm>
           <a:prstGeom prst="roundRect">
             <a:avLst/>
@@ -28755,8 +28849,8 @@
         </p:nvSpPr>
         <p:spPr>
           <a:xfrm>
-            <a:off x="1508760" y="3858768"/>
-            <a:ext cx="2286000" cy="256032"/>
+            <a:off x="1508759" y="3813147"/>
+            <a:ext cx="2709557" cy="347275"/>
           </a:xfrm>
           <a:prstGeom prst="rect">
             <a:avLst/>
@@ -28775,7 +28869,7 @@
               </a:lnSpc>
             </a:pPr>
             <a:r>
-              <a:rPr sz="1830" b="1">
+              <a:rPr sz="1830" b="1" dirty="0">
                 <a:solidFill>
                   <a:srgbClr val="166534"/>
                 </a:solidFill>
@@ -29614,15 +29708,7 @@
 
 <file path=ppt/slides/slide7.xml><?xml version="1.0" encoding="utf-8"?>
 <p:sld xmlns:a="http://schemas.openxmlformats.org/drawingml/2006/main" xmlns:r="http://schemas.openxmlformats.org/officeDocument/2006/relationships" xmlns:p="http://schemas.openxmlformats.org/presentationml/2006/main">
-  <p:cSld name="Slide 7">
-    <p:bg>
-      <p:bgPr>
-        <a:solidFill>
-          <a:srgbClr val="F7F8FA"/>
-        </a:solidFill>
-        <a:effectLst/>
-      </p:bgPr>
-    </p:bg>
+  <p:cSld>
     <p:spTree>
       <p:nvGrpSpPr>
         <p:cNvPr id="1" name=""/>
@@ -29639,1127 +29725,736 @@
       </p:grpSpPr>
       <p:sp>
         <p:nvSpPr>
-          <p:cNvPr id="2" name="TextBox 1"/>
-          <p:cNvSpPr txBox="1"/>
-          <p:nvPr/>
-        </p:nvSpPr>
-        <p:spPr>
-          <a:xfrm>
-            <a:off x="502920" y="274320"/>
-            <a:ext cx="11155680" cy="411480"/>
-          </a:xfrm>
-          <a:prstGeom prst="rect">
-            <a:avLst/>
-          </a:prstGeom>
-          <a:noFill/>
-        </p:spPr>
-        <p:txBody>
-          <a:bodyPr wrap="square" lIns="38100" tIns="38100" rIns="38100" bIns="38100" anchor="ctr">
-            <a:spAutoFit/>
+          <p:cNvPr id="2" name="Text 0"/>
+          <p:cNvSpPr/>
+          <p:nvPr/>
+        </p:nvSpPr>
+        <p:spPr>
+          <a:xfrm>
+            <a:off x="502920" y="320040"/>
+            <a:ext cx="10607040" cy="502920"/>
+          </a:xfrm>
+          <a:prstGeom prst="rect">
+            <a:avLst/>
+          </a:prstGeom>
+          <a:noFill/>
+          <a:ln/>
+        </p:spPr>
+        <p:txBody>
+          <a:bodyPr wrap="square" lIns="0" tIns="0" rIns="0" bIns="0" rtlCol="0" anchor="ctr"/>
+          <a:lstStyle/>
+          <a:p>
+            <a:pPr marL="0" indent="0">
+              <a:buNone/>
+            </a:pPr>
+            <a:r>
+              <a:rPr lang="en-US" sz="3000" b="1" dirty="0">
+                <a:solidFill>
+                  <a:srgbClr val="111827"/>
+                </a:solidFill>
+                <a:latin typeface="Aptos Display" pitchFamily="34" charset="0"/>
+                <a:ea typeface="Aptos Display" pitchFamily="34" charset="-122"/>
+                <a:cs typeface="Aptos Display" pitchFamily="34" charset="-120"/>
+              </a:rPr>
+              <a:t>Install Python + VS Code quickly</a:t>
+            </a:r>
+            <a:endParaRPr lang="en-US" sz="3000" dirty="0"/>
+          </a:p>
+        </p:txBody>
+      </p:sp>
+      <p:sp>
+        <p:nvSpPr>
+          <p:cNvPr id="3" name="Text 1"/>
+          <p:cNvSpPr/>
+          <p:nvPr/>
+        </p:nvSpPr>
+        <p:spPr>
+          <a:xfrm>
+            <a:off x="530352" y="841248"/>
+            <a:ext cx="10424160" cy="292608"/>
+          </a:xfrm>
+          <a:prstGeom prst="rect">
+            <a:avLst/>
+          </a:prstGeom>
+          <a:noFill/>
+          <a:ln/>
+        </p:spPr>
+        <p:txBody>
+          <a:bodyPr wrap="square" lIns="0" tIns="0" rIns="0" bIns="0" rtlCol="0" anchor="ctr"/>
+          <a:lstStyle/>
+          <a:p>
+            <a:pPr marL="0" indent="0">
+              <a:buNone/>
+            </a:pPr>
+            <a:r>
+              <a:rPr lang="en-US" sz="1650" dirty="0">
+                <a:solidFill>
+                  <a:srgbClr val="4B5563"/>
+                </a:solidFill>
+              </a:rPr>
+              <a:t>Beginner setup for Windows laptops.</a:t>
+            </a:r>
+            <a:endParaRPr lang="en-US" sz="1650" dirty="0"/>
+          </a:p>
+        </p:txBody>
+      </p:sp>
+      <p:sp>
+        <p:nvSpPr>
+          <p:cNvPr id="4" name="Shape 2"/>
+          <p:cNvSpPr/>
+          <p:nvPr/>
+        </p:nvSpPr>
+        <p:spPr>
+          <a:xfrm>
+            <a:off x="502920" y="1170432"/>
+            <a:ext cx="914400" cy="54864"/>
+          </a:xfrm>
+          <a:prstGeom prst="rect">
+            <a:avLst/>
+          </a:prstGeom>
+          <a:solidFill>
+            <a:srgbClr val="2563EB"/>
+          </a:solidFill>
+          <a:ln w="12700">
+            <a:solidFill>
+              <a:srgbClr val="2563EB"/>
+            </a:solidFill>
+            <a:prstDash val="solid"/>
+          </a:ln>
+        </p:spPr>
+        <p:txBody>
+          <a:bodyPr/>
+          <a:lstStyle/>
+          <a:p>
+            <a:endParaRPr lang="en-US"/>
+          </a:p>
+        </p:txBody>
+      </p:sp>
+      <p:sp>
+        <p:nvSpPr>
+          <p:cNvPr id="5" name="Shape 3"/>
+          <p:cNvSpPr/>
+          <p:nvPr/>
+        </p:nvSpPr>
+        <p:spPr>
+          <a:xfrm>
+            <a:off x="736930" y="1276364"/>
+            <a:ext cx="5643401" cy="1488058"/>
+          </a:xfrm>
+          <a:prstGeom prst="roundRect">
+            <a:avLst>
+              <a:gd name="adj" fmla="val 7742"/>
+            </a:avLst>
+          </a:prstGeom>
+          <a:solidFill>
+            <a:srgbClr val="EFF6FF"/>
+          </a:solidFill>
+          <a:ln w="12700">
+            <a:solidFill>
+              <a:srgbClr val="E5E7EB"/>
+            </a:solidFill>
+            <a:prstDash val="solid"/>
+          </a:ln>
+          <a:effectLst>
+            <a:outerShdw blurRad="25400" dist="12700" dir="2700000" algn="bl" rotWithShape="0">
+              <a:srgbClr val="CBD5E1">
+                <a:alpha val="18000"/>
+              </a:srgbClr>
+            </a:outerShdw>
+          </a:effectLst>
+        </p:spPr>
+        <p:txBody>
+          <a:bodyPr/>
+          <a:lstStyle/>
+          <a:p>
+            <a:endParaRPr lang="en-US" sz="1600" dirty="0"/>
+          </a:p>
+        </p:txBody>
+      </p:sp>
+      <p:sp>
+        <p:nvSpPr>
+          <p:cNvPr id="6" name="Text 4"/>
+          <p:cNvSpPr/>
+          <p:nvPr/>
+        </p:nvSpPr>
+        <p:spPr>
+          <a:xfrm>
+            <a:off x="901523" y="1422668"/>
+            <a:ext cx="3099816" cy="310896"/>
+          </a:xfrm>
+          <a:prstGeom prst="rect">
+            <a:avLst/>
+          </a:prstGeom>
+          <a:noFill/>
+          <a:ln/>
+        </p:spPr>
+        <p:txBody>
+          <a:bodyPr wrap="square" lIns="0" tIns="0" rIns="0" bIns="0" rtlCol="0" anchor="ctr"/>
+          <a:lstStyle/>
+          <a:p>
+            <a:pPr marL="0" indent="0">
+              <a:buNone/>
+            </a:pPr>
+            <a:r>
+              <a:rPr lang="en-US" b="1" dirty="0">
+                <a:solidFill>
+                  <a:srgbClr val="2563EB"/>
+                </a:solidFill>
+              </a:rPr>
+              <a:t>1. Install Python 3</a:t>
+            </a:r>
+            <a:endParaRPr lang="en-US" dirty="0"/>
+          </a:p>
+        </p:txBody>
+      </p:sp>
+      <p:sp>
+        <p:nvSpPr>
+          <p:cNvPr id="7" name="Text 5"/>
+          <p:cNvSpPr/>
+          <p:nvPr/>
+        </p:nvSpPr>
+        <p:spPr>
+          <a:xfrm>
+            <a:off x="901522" y="1825003"/>
+            <a:ext cx="5875625" cy="1006099"/>
+          </a:xfrm>
+          <a:prstGeom prst="rect">
+            <a:avLst/>
+          </a:prstGeom>
+          <a:noFill/>
+          <a:ln/>
+        </p:spPr>
+        <p:txBody>
+          <a:bodyPr wrap="square" lIns="254" tIns="254" rIns="254" bIns="254" rtlCol="0" anchor="t">
+            <a:normAutofit/>
           </a:bodyPr>
           <a:lstStyle/>
           <a:p>
-            <a:pPr algn="l">
-              <a:lnSpc>
-                <a:spcPct val="96000"/>
-              </a:lnSpc>
-            </a:pPr>
-            <a:r>
-              <a:rPr sz="3400" b="1">
+            <a:pPr marL="285750" indent="-285750">
+              <a:buFont typeface="Arial" panose="020B0604020202020204" pitchFamily="34" charset="0"/>
+              <a:buChar char="•"/>
+            </a:pPr>
+            <a:r>
+              <a:rPr lang="en-US" sz="1600">
                 <a:solidFill>
                   <a:srgbClr val="111827"/>
                 </a:solidFill>
-                <a:latin typeface="Aptos Display"/>
-              </a:rPr>
-              <a:t>Install Python + VS Code quickly</a:t>
-            </a:r>
-          </a:p>
-        </p:txBody>
-      </p:sp>
-      <p:sp>
-        <p:nvSpPr>
-          <p:cNvPr id="3" name="TextBox 2"/>
-          <p:cNvSpPr txBox="1"/>
-          <p:nvPr/>
-        </p:nvSpPr>
-        <p:spPr>
-          <a:xfrm>
-            <a:off x="530352" y="731520"/>
-            <a:ext cx="10972800" cy="256032"/>
-          </a:xfrm>
-          <a:prstGeom prst="rect">
-            <a:avLst/>
-          </a:prstGeom>
-          <a:noFill/>
-        </p:spPr>
-        <p:txBody>
-          <a:bodyPr wrap="square" lIns="25400" tIns="25400" rIns="25400" bIns="25400" anchor="ctr">
-            <a:spAutoFit/>
+              </a:rPr>
+              <a:t>Download Python 3 </a:t>
+            </a:r>
+          </a:p>
+          <a:p>
+            <a:pPr marL="285750" indent="-285750">
+              <a:buFont typeface="Arial" panose="020B0604020202020204" pitchFamily="34" charset="0"/>
+              <a:buChar char="•"/>
+            </a:pPr>
+            <a:r>
+              <a:rPr lang="en-US" sz="1600">
+                <a:solidFill>
+                  <a:srgbClr val="111827"/>
+                </a:solidFill>
+              </a:rPr>
+              <a:t>Add Python to PATH for window</a:t>
+            </a:r>
+          </a:p>
+          <a:p>
+            <a:pPr marL="171450" indent="-171450">
+              <a:buFont typeface="Arial" panose="020B0604020202020204" pitchFamily="34" charset="0"/>
+              <a:buChar char="•"/>
+            </a:pPr>
+            <a:r>
+              <a:rPr lang="en-US" sz="1200">
+                <a:solidFill>
+                  <a:srgbClr val="111827"/>
+                </a:solidFill>
+              </a:rPr>
+              <a:t>WINDOW_KEY + R : </a:t>
+            </a:r>
+            <a:r>
+              <a:rPr lang="en-US" sz="1400"/>
+              <a:t>%localappdata%\Programs\Python</a:t>
+            </a:r>
+          </a:p>
+          <a:p>
+            <a:pPr marL="171450" indent="-171450">
+              <a:buFont typeface="Arial" panose="020B0604020202020204" pitchFamily="34" charset="0"/>
+              <a:buChar char="•"/>
+            </a:pPr>
+            <a:r>
+              <a:rPr lang="en-US" sz="1200">
+                <a:solidFill>
+                  <a:srgbClr val="111827"/>
+                </a:solidFill>
+              </a:rPr>
+              <a:t>WINDOW_KEY + S: env</a:t>
+            </a:r>
+          </a:p>
+          <a:p>
+            <a:pPr marL="0" indent="0">
+              <a:buNone/>
+            </a:pPr>
+            <a:endParaRPr lang="en-US" sz="1600" dirty="0">
+              <a:solidFill>
+                <a:srgbClr val="111827"/>
+              </a:solidFill>
+            </a:endParaRPr>
+          </a:p>
+        </p:txBody>
+      </p:sp>
+      <p:sp>
+        <p:nvSpPr>
+          <p:cNvPr id="8" name="Shape 6"/>
+          <p:cNvSpPr/>
+          <p:nvPr/>
+        </p:nvSpPr>
+        <p:spPr>
+          <a:xfrm>
+            <a:off x="7903580" y="807194"/>
+            <a:ext cx="3264408" cy="1957227"/>
+          </a:xfrm>
+          <a:prstGeom prst="roundRect">
+            <a:avLst>
+              <a:gd name="adj" fmla="val 7742"/>
+            </a:avLst>
+          </a:prstGeom>
+          <a:solidFill>
+            <a:srgbClr val="ECFDF5"/>
+          </a:solidFill>
+          <a:ln w="12700">
+            <a:solidFill>
+              <a:srgbClr val="E5E7EB"/>
+            </a:solidFill>
+            <a:prstDash val="solid"/>
+          </a:ln>
+          <a:effectLst>
+            <a:outerShdw blurRad="25400" dist="12700" dir="2700000" algn="bl" rotWithShape="0">
+              <a:srgbClr val="CBD5E1">
+                <a:alpha val="18000"/>
+              </a:srgbClr>
+            </a:outerShdw>
+          </a:effectLst>
+        </p:spPr>
+        <p:txBody>
+          <a:bodyPr/>
+          <a:lstStyle/>
+          <a:p>
+            <a:endParaRPr lang="en-US" sz="1600" dirty="0"/>
+          </a:p>
+        </p:txBody>
+      </p:sp>
+      <p:sp>
+        <p:nvSpPr>
+          <p:cNvPr id="9" name="Text 7"/>
+          <p:cNvSpPr/>
+          <p:nvPr/>
+        </p:nvSpPr>
+        <p:spPr>
+          <a:xfrm>
+            <a:off x="8068172" y="953499"/>
+            <a:ext cx="3099816" cy="310896"/>
+          </a:xfrm>
+          <a:prstGeom prst="rect">
+            <a:avLst/>
+          </a:prstGeom>
+          <a:noFill/>
+          <a:ln/>
+        </p:spPr>
+        <p:txBody>
+          <a:bodyPr wrap="square" lIns="0" tIns="0" rIns="0" bIns="0" rtlCol="0" anchor="ctr"/>
+          <a:lstStyle/>
+          <a:p>
+            <a:pPr marL="0" indent="0">
+              <a:buNone/>
+            </a:pPr>
+            <a:r>
+              <a:rPr lang="en-US" b="1" dirty="0">
+                <a:solidFill>
+                  <a:srgbClr val="059669"/>
+                </a:solidFill>
+              </a:rPr>
+              <a:t>2. Install VS Code</a:t>
+            </a:r>
+            <a:endParaRPr lang="en-US" dirty="0"/>
+          </a:p>
+        </p:txBody>
+      </p:sp>
+      <p:sp>
+        <p:nvSpPr>
+          <p:cNvPr id="10" name="Text 8"/>
+          <p:cNvSpPr/>
+          <p:nvPr/>
+        </p:nvSpPr>
+        <p:spPr>
+          <a:xfrm>
+            <a:off x="8068172" y="1311496"/>
+            <a:ext cx="3099816" cy="758952"/>
+          </a:xfrm>
+          <a:prstGeom prst="rect">
+            <a:avLst/>
+          </a:prstGeom>
+          <a:noFill/>
+          <a:ln/>
+        </p:spPr>
+        <p:txBody>
+          <a:bodyPr wrap="square" lIns="254" tIns="254" rIns="254" bIns="254" rtlCol="0" anchor="t">
+            <a:normAutofit/>
           </a:bodyPr>
           <a:lstStyle/>
           <a:p>
-            <a:pPr algn="l">
-              <a:lnSpc>
-                <a:spcPct val="86000"/>
-              </a:lnSpc>
-            </a:pPr>
-            <a:r>
-              <a:rPr sz="1700" b="0">
-                <a:solidFill>
-                  <a:srgbClr val="1D4ED8"/>
-                </a:solidFill>
-                <a:latin typeface="Aptos"/>
-              </a:rPr>
-              <a:t>Beginner setup for Windows laptops.</a:t>
-            </a:r>
-          </a:p>
-        </p:txBody>
-      </p:sp>
-      <p:sp>
-        <p:nvSpPr>
-          <p:cNvPr id="4" name="Rounded Rectangle 3"/>
-          <p:cNvSpPr/>
-          <p:nvPr/>
-        </p:nvSpPr>
-        <p:spPr>
-          <a:xfrm>
-            <a:off x="640080" y="1143000"/>
-            <a:ext cx="3337560" cy="1508760"/>
+            <a:pPr marL="0" indent="0">
+              <a:buNone/>
+            </a:pPr>
+            <a:r>
+              <a:rPr lang="en-US" sz="1600" dirty="0">
+                <a:solidFill>
+                  <a:srgbClr val="111827"/>
+                </a:solidFill>
+              </a:rPr>
+              <a:t>Install Visual Studio Code. Open Extensions and install the Python extension.</a:t>
+            </a:r>
+            <a:endParaRPr lang="en-US" sz="1600" dirty="0"/>
+          </a:p>
+        </p:txBody>
+      </p:sp>
+      <p:sp>
+        <p:nvSpPr>
+          <p:cNvPr id="11" name="Shape 9"/>
+          <p:cNvSpPr/>
+          <p:nvPr/>
+        </p:nvSpPr>
+        <p:spPr>
+          <a:xfrm>
+            <a:off x="7845552" y="3154939"/>
+            <a:ext cx="3429000" cy="1307592"/>
           </a:xfrm>
           <a:prstGeom prst="roundRect">
-            <a:avLst/>
+            <a:avLst>
+              <a:gd name="adj" fmla="val 7742"/>
+            </a:avLst>
           </a:prstGeom>
           <a:solidFill>
-            <a:srgbClr val="DBEAFE"/>
+            <a:srgbClr val="F5F3FF"/>
           </a:solidFill>
-          <a:ln>
+          <a:ln w="12700">
             <a:solidFill>
-              <a:srgbClr val="DBEAFE"/>
+              <a:srgbClr val="E5E7EB"/>
             </a:solidFill>
+            <a:prstDash val="solid"/>
           </a:ln>
-        </p:spPr>
-        <p:style>
-          <a:lnRef idx="1">
-            <a:schemeClr val="accent1"/>
-          </a:lnRef>
-          <a:fillRef idx="3">
-            <a:schemeClr val="accent1"/>
-          </a:fillRef>
-          <a:effectRef idx="2">
-            <a:schemeClr val="accent1"/>
-          </a:effectRef>
-          <a:fontRef idx="minor">
-            <a:schemeClr val="lt1"/>
-          </a:fontRef>
-        </p:style>
-        <p:txBody>
-          <a:bodyPr wrap="square" lIns="38100" tIns="38100" rIns="38100" bIns="38100" rtlCol="0" anchor="ctr"/>
-          <a:lstStyle/>
-          <a:p>
-            <a:pPr algn="ctr">
-              <a:lnSpc>
-                <a:spcPct val="96000"/>
-              </a:lnSpc>
-            </a:pPr>
-            <a:endParaRPr/>
-          </a:p>
-        </p:txBody>
-      </p:sp>
-      <p:sp>
-        <p:nvSpPr>
-          <p:cNvPr id="5" name="TextBox 4"/>
-          <p:cNvSpPr txBox="1"/>
-          <p:nvPr/>
-        </p:nvSpPr>
-        <p:spPr>
-          <a:xfrm>
-            <a:off x="804671" y="1325880"/>
-            <a:ext cx="320040" cy="256032"/>
-          </a:xfrm>
-          <a:prstGeom prst="rect">
-            <a:avLst/>
-          </a:prstGeom>
-          <a:noFill/>
-        </p:spPr>
-        <p:txBody>
-          <a:bodyPr wrap="square" lIns="38100" tIns="38100" rIns="38100" bIns="38100" anchor="ctr">
-            <a:spAutoFit/>
+          <a:effectLst>
+            <a:outerShdw blurRad="25400" dist="12700" dir="2700000" algn="bl" rotWithShape="0">
+              <a:srgbClr val="CBD5E1">
+                <a:alpha val="18000"/>
+              </a:srgbClr>
+            </a:outerShdw>
+          </a:effectLst>
+        </p:spPr>
+        <p:txBody>
+          <a:bodyPr/>
+          <a:lstStyle/>
+          <a:p>
+            <a:endParaRPr lang="en-US"/>
+          </a:p>
+        </p:txBody>
+      </p:sp>
+      <p:sp>
+        <p:nvSpPr>
+          <p:cNvPr id="12" name="Text 10"/>
+          <p:cNvSpPr/>
+          <p:nvPr/>
+        </p:nvSpPr>
+        <p:spPr>
+          <a:xfrm>
+            <a:off x="8010144" y="3301243"/>
+            <a:ext cx="3099816" cy="310896"/>
+          </a:xfrm>
+          <a:prstGeom prst="rect">
+            <a:avLst/>
+          </a:prstGeom>
+          <a:noFill/>
+          <a:ln/>
+        </p:spPr>
+        <p:txBody>
+          <a:bodyPr wrap="square" lIns="0" tIns="0" rIns="0" bIns="0" rtlCol="0" anchor="ctr"/>
+          <a:lstStyle/>
+          <a:p>
+            <a:pPr marL="0" indent="0">
+              <a:buNone/>
+            </a:pPr>
+            <a:r>
+              <a:rPr lang="en-US" b="1" dirty="0">
+                <a:solidFill>
+                  <a:srgbClr val="7C3AED"/>
+                </a:solidFill>
+              </a:rPr>
+              <a:t>3. Verify</a:t>
+            </a:r>
+            <a:endParaRPr lang="en-US" dirty="0"/>
+          </a:p>
+        </p:txBody>
+      </p:sp>
+      <p:sp>
+        <p:nvSpPr>
+          <p:cNvPr id="13" name="Text 11"/>
+          <p:cNvSpPr/>
+          <p:nvPr/>
+        </p:nvSpPr>
+        <p:spPr>
+          <a:xfrm>
+            <a:off x="8010144" y="3625855"/>
+            <a:ext cx="3099816" cy="758952"/>
+          </a:xfrm>
+          <a:prstGeom prst="rect">
+            <a:avLst/>
+          </a:prstGeom>
+          <a:noFill/>
+          <a:ln/>
+        </p:spPr>
+        <p:txBody>
+          <a:bodyPr wrap="square" lIns="254" tIns="254" rIns="254" bIns="254" rtlCol="0" anchor="t">
+            <a:normAutofit/>
           </a:bodyPr>
           <a:lstStyle/>
           <a:p>
-            <a:pPr algn="ctr">
-              <a:lnSpc>
-                <a:spcPct val="96000"/>
-              </a:lnSpc>
-            </a:pPr>
-            <a:r>
-              <a:rPr sz="2500" b="1">
-                <a:solidFill>
-                  <a:srgbClr val="1D4ED8"/>
-                </a:solidFill>
-                <a:latin typeface="Aptos"/>
-              </a:rPr>
-              <a:t>1</a:t>
-            </a:r>
-          </a:p>
-        </p:txBody>
-      </p:sp>
-      <p:sp>
-        <p:nvSpPr>
-          <p:cNvPr id="6" name="TextBox 5"/>
-          <p:cNvSpPr txBox="1"/>
-          <p:nvPr/>
-        </p:nvSpPr>
-        <p:spPr>
-          <a:xfrm>
-            <a:off x="3337560" y="1298448"/>
-            <a:ext cx="411480" cy="320040"/>
-          </a:xfrm>
-          <a:prstGeom prst="rect">
-            <a:avLst/>
-          </a:prstGeom>
-          <a:noFill/>
-        </p:spPr>
-        <p:txBody>
-          <a:bodyPr wrap="square" lIns="38100" tIns="38100" rIns="38100" bIns="38100" anchor="ctr">
-            <a:spAutoFit/>
-          </a:bodyPr>
-          <a:lstStyle/>
-          <a:p>
-            <a:pPr algn="ctr">
-              <a:lnSpc>
-                <a:spcPct val="96000"/>
-              </a:lnSpc>
-            </a:pPr>
-            <a:r>
-              <a:rPr sz="2500" b="0">
+            <a:pPr marL="0" indent="0">
+              <a:buNone/>
+            </a:pPr>
+            <a:r>
+              <a:rPr lang="en-US" sz="1650" dirty="0">
                 <a:solidFill>
                   <a:srgbClr val="111827"/>
                 </a:solidFill>
-                <a:latin typeface="Aptos"/>
-              </a:rPr>
-              <a:t>🐍</a:t>
-            </a:r>
-          </a:p>
-        </p:txBody>
-      </p:sp>
-      <p:sp>
-        <p:nvSpPr>
-          <p:cNvPr id="7" name="TextBox 6"/>
-          <p:cNvSpPr txBox="1"/>
-          <p:nvPr/>
-        </p:nvSpPr>
-        <p:spPr>
-          <a:xfrm>
-            <a:off x="1170431" y="1280160"/>
-            <a:ext cx="2057400" cy="228600"/>
-          </a:xfrm>
-          <a:prstGeom prst="rect">
-            <a:avLst/>
-          </a:prstGeom>
-          <a:noFill/>
-        </p:spPr>
-        <p:txBody>
-          <a:bodyPr wrap="square" lIns="38100" tIns="38100" rIns="38100" bIns="38100" anchor="ctr">
-            <a:spAutoFit/>
-          </a:bodyPr>
-          <a:lstStyle/>
-          <a:p>
-            <a:pPr algn="l">
-              <a:lnSpc>
-                <a:spcPct val="96000"/>
-              </a:lnSpc>
-            </a:pPr>
-            <a:r>
-              <a:rPr sz="1830" b="1">
-                <a:solidFill>
-                  <a:srgbClr val="1D4ED8"/>
-                </a:solidFill>
-                <a:latin typeface="Aptos"/>
-              </a:rPr>
-              <a:t>Install Python 3</a:t>
-            </a:r>
-          </a:p>
-        </p:txBody>
-      </p:sp>
-      <p:sp>
-        <p:nvSpPr>
-          <p:cNvPr id="8" name="TextBox 7"/>
-          <p:cNvSpPr txBox="1"/>
-          <p:nvPr/>
-        </p:nvSpPr>
-        <p:spPr>
-          <a:xfrm>
-            <a:off x="1170431" y="1645920"/>
-            <a:ext cx="2468880" cy="411480"/>
-          </a:xfrm>
-          <a:prstGeom prst="rect">
-            <a:avLst/>
-          </a:prstGeom>
-          <a:noFill/>
-        </p:spPr>
-        <p:txBody>
-          <a:bodyPr wrap="square" lIns="38100" tIns="38100" rIns="38100" bIns="38100" anchor="t">
-            <a:spAutoFit/>
-          </a:bodyPr>
-          <a:lstStyle/>
-          <a:p>
-            <a:pPr algn="l">
-              <a:lnSpc>
-                <a:spcPct val="96000"/>
-              </a:lnSpc>
-            </a:pPr>
-            <a:r>
-              <a:rPr sz="1520" b="0">
-                <a:solidFill>
-                  <a:srgbClr val="111827"/>
-                </a:solidFill>
-                <a:latin typeface="Aptos"/>
-              </a:rPr>
-              <a:t>Download Python 3 and tick Add Python to PATH.</a:t>
-            </a:r>
-          </a:p>
-        </p:txBody>
-      </p:sp>
-      <p:cxnSp>
-        <p:nvCxnSpPr>
-          <p:cNvPr id="9" name="Connector 8"/>
-          <p:cNvCxnSpPr/>
-          <p:nvPr/>
-        </p:nvCxnSpPr>
-        <p:spPr>
-          <a:xfrm>
-            <a:off x="4005072" y="1901952"/>
-            <a:ext cx="402336" cy="0"/>
-          </a:xfrm>
-          <a:prstGeom prst="line">
-            <a:avLst/>
-          </a:prstGeom>
-          <a:ln w="27940">
-            <a:solidFill>
-              <a:srgbClr val="94A3B8"/>
-            </a:solidFill>
-          </a:ln>
-        </p:spPr>
-        <p:style>
-          <a:lnRef idx="2">
-            <a:schemeClr val="accent1"/>
-          </a:lnRef>
-          <a:fillRef idx="0">
-            <a:schemeClr val="accent1"/>
-          </a:fillRef>
-          <a:effectRef idx="1">
-            <a:schemeClr val="accent1"/>
-          </a:effectRef>
-          <a:fontRef idx="minor">
-            <a:schemeClr val="tx1"/>
-          </a:fontRef>
-        </p:style>
-      </p:cxnSp>
-      <p:sp>
-        <p:nvSpPr>
-          <p:cNvPr id="10" name="Rounded Rectangle 9"/>
-          <p:cNvSpPr/>
-          <p:nvPr/>
-        </p:nvSpPr>
-        <p:spPr>
-          <a:xfrm>
-            <a:off x="4480560" y="1142999"/>
-            <a:ext cx="3337560" cy="1929371"/>
+              </a:rPr>
+              <a:t>Open Terminal in VS Code. Check Python version and install learning packages.</a:t>
+            </a:r>
+            <a:endParaRPr lang="en-US" sz="1650" dirty="0"/>
+          </a:p>
+        </p:txBody>
+      </p:sp>
+      <p:sp>
+        <p:nvSpPr>
+          <p:cNvPr id="14" name="Shape 12"/>
+          <p:cNvSpPr/>
+          <p:nvPr/>
+        </p:nvSpPr>
+        <p:spPr>
+          <a:xfrm>
+            <a:off x="7845553" y="4554381"/>
+            <a:ext cx="3765890" cy="785090"/>
           </a:xfrm>
           <a:prstGeom prst="roundRect">
-            <a:avLst/>
-          </a:prstGeom>
-          <a:solidFill>
-            <a:srgbClr val="DCFCE7"/>
-          </a:solidFill>
-          <a:ln>
-            <a:solidFill>
-              <a:srgbClr val="DCFCE7"/>
-            </a:solidFill>
-          </a:ln>
-        </p:spPr>
-        <p:style>
-          <a:lnRef idx="1">
-            <a:schemeClr val="accent1"/>
-          </a:lnRef>
-          <a:fillRef idx="3">
-            <a:schemeClr val="accent1"/>
-          </a:fillRef>
-          <a:effectRef idx="2">
-            <a:schemeClr val="accent1"/>
-          </a:effectRef>
-          <a:fontRef idx="minor">
-            <a:schemeClr val="lt1"/>
-          </a:fontRef>
-        </p:style>
-        <p:txBody>
-          <a:bodyPr wrap="square" lIns="38100" tIns="38100" rIns="38100" bIns="38100" rtlCol="0" anchor="ctr"/>
-          <a:lstStyle/>
-          <a:p>
-            <a:pPr algn="ctr">
-              <a:lnSpc>
-                <a:spcPct val="96000"/>
-              </a:lnSpc>
-            </a:pPr>
-            <a:endParaRPr dirty="0"/>
-          </a:p>
-        </p:txBody>
-      </p:sp>
-      <p:sp>
-        <p:nvSpPr>
-          <p:cNvPr id="11" name="TextBox 10"/>
-          <p:cNvSpPr txBox="1"/>
-          <p:nvPr/>
-        </p:nvSpPr>
-        <p:spPr>
-          <a:xfrm>
-            <a:off x="4645152" y="1325880"/>
-            <a:ext cx="320040" cy="256032"/>
-          </a:xfrm>
-          <a:prstGeom prst="rect">
-            <a:avLst/>
-          </a:prstGeom>
-          <a:noFill/>
-        </p:spPr>
-        <p:txBody>
-          <a:bodyPr wrap="square" lIns="38100" tIns="38100" rIns="38100" bIns="38100" anchor="ctr">
-            <a:spAutoFit/>
-          </a:bodyPr>
-          <a:lstStyle/>
-          <a:p>
-            <a:pPr algn="ctr">
-              <a:lnSpc>
-                <a:spcPct val="96000"/>
-              </a:lnSpc>
-            </a:pPr>
-            <a:r>
-              <a:rPr sz="2500" b="1">
-                <a:solidFill>
-                  <a:srgbClr val="166534"/>
-                </a:solidFill>
-                <a:latin typeface="Aptos"/>
-              </a:rPr>
-              <a:t>2</a:t>
-            </a:r>
-          </a:p>
-        </p:txBody>
-      </p:sp>
-      <p:sp>
-        <p:nvSpPr>
-          <p:cNvPr id="12" name="TextBox 11"/>
-          <p:cNvSpPr txBox="1"/>
-          <p:nvPr/>
-        </p:nvSpPr>
-        <p:spPr>
-          <a:xfrm>
-            <a:off x="7178040" y="1298448"/>
-            <a:ext cx="411480" cy="320040"/>
-          </a:xfrm>
-          <a:prstGeom prst="rect">
-            <a:avLst/>
-          </a:prstGeom>
-          <a:noFill/>
-        </p:spPr>
-        <p:txBody>
-          <a:bodyPr wrap="square" lIns="38100" tIns="38100" rIns="38100" bIns="38100" anchor="ctr">
-            <a:spAutoFit/>
-          </a:bodyPr>
-          <a:lstStyle/>
-          <a:p>
-            <a:pPr algn="ctr">
-              <a:lnSpc>
-                <a:spcPct val="96000"/>
-              </a:lnSpc>
-            </a:pPr>
-            <a:r>
-              <a:rPr sz="2500" b="0">
-                <a:solidFill>
-                  <a:srgbClr val="111827"/>
-                </a:solidFill>
-                <a:latin typeface="Aptos"/>
-              </a:rPr>
-              <a:t>🧰</a:t>
-            </a:r>
-          </a:p>
-        </p:txBody>
-      </p:sp>
-      <p:sp>
-        <p:nvSpPr>
-          <p:cNvPr id="13" name="TextBox 12"/>
-          <p:cNvSpPr txBox="1"/>
-          <p:nvPr/>
-        </p:nvSpPr>
-        <p:spPr>
-          <a:xfrm>
-            <a:off x="5010912" y="1280160"/>
-            <a:ext cx="2057400" cy="228600"/>
-          </a:xfrm>
-          <a:prstGeom prst="rect">
-            <a:avLst/>
-          </a:prstGeom>
-          <a:noFill/>
-        </p:spPr>
-        <p:txBody>
-          <a:bodyPr wrap="square" lIns="38100" tIns="38100" rIns="38100" bIns="38100" anchor="ctr">
-            <a:spAutoFit/>
-          </a:bodyPr>
-          <a:lstStyle/>
-          <a:p>
-            <a:pPr algn="l">
-              <a:lnSpc>
-                <a:spcPct val="96000"/>
-              </a:lnSpc>
-            </a:pPr>
-            <a:r>
-              <a:rPr sz="1830" b="1">
-                <a:solidFill>
-                  <a:srgbClr val="166534"/>
-                </a:solidFill>
-                <a:latin typeface="Aptos"/>
-              </a:rPr>
-              <a:t>Install VS Code</a:t>
-            </a:r>
-          </a:p>
-        </p:txBody>
-      </p:sp>
-      <p:sp>
-        <p:nvSpPr>
-          <p:cNvPr id="14" name="TextBox 13"/>
-          <p:cNvSpPr txBox="1"/>
-          <p:nvPr/>
-        </p:nvSpPr>
-        <p:spPr>
-          <a:xfrm>
-            <a:off x="5010912" y="1645920"/>
-            <a:ext cx="2468880" cy="411480"/>
-          </a:xfrm>
-          <a:prstGeom prst="rect">
-            <a:avLst/>
-          </a:prstGeom>
-          <a:noFill/>
-        </p:spPr>
-        <p:txBody>
-          <a:bodyPr wrap="square" lIns="38100" tIns="38100" rIns="38100" bIns="38100" anchor="t">
-            <a:spAutoFit/>
-          </a:bodyPr>
-          <a:lstStyle/>
-          <a:p>
-            <a:pPr algn="l">
-              <a:lnSpc>
-                <a:spcPct val="96000"/>
-              </a:lnSpc>
-            </a:pPr>
-            <a:r>
-              <a:rPr sz="1520" b="0" dirty="0">
-                <a:solidFill>
-                  <a:srgbClr val="111827"/>
-                </a:solidFill>
-                <a:latin typeface="Aptos"/>
-              </a:rPr>
-              <a:t>Open Extensions and install the Python extension.</a:t>
-            </a:r>
-          </a:p>
-        </p:txBody>
-      </p:sp>
-      <p:cxnSp>
-        <p:nvCxnSpPr>
-          <p:cNvPr id="15" name="Connector 14"/>
-          <p:cNvCxnSpPr/>
-          <p:nvPr/>
-        </p:nvCxnSpPr>
-        <p:spPr>
-          <a:xfrm>
-            <a:off x="7845552" y="1901952"/>
-            <a:ext cx="402336" cy="0"/>
-          </a:xfrm>
-          <a:prstGeom prst="line">
-            <a:avLst/>
-          </a:prstGeom>
-          <a:ln w="27940">
-            <a:solidFill>
-              <a:srgbClr val="94A3B8"/>
-            </a:solidFill>
-          </a:ln>
-        </p:spPr>
-        <p:style>
-          <a:lnRef idx="2">
-            <a:schemeClr val="accent1"/>
-          </a:lnRef>
-          <a:fillRef idx="0">
-            <a:schemeClr val="accent1"/>
-          </a:fillRef>
-          <a:effectRef idx="1">
-            <a:schemeClr val="accent1"/>
-          </a:effectRef>
-          <a:fontRef idx="minor">
-            <a:schemeClr val="tx1"/>
-          </a:fontRef>
-        </p:style>
-      </p:cxnSp>
-      <p:sp>
-        <p:nvSpPr>
-          <p:cNvPr id="16" name="Rounded Rectangle 15"/>
-          <p:cNvSpPr/>
-          <p:nvPr/>
-        </p:nvSpPr>
-        <p:spPr>
-          <a:xfrm>
-            <a:off x="8321040" y="1143000"/>
-            <a:ext cx="3337560" cy="1508760"/>
-          </a:xfrm>
-          <a:prstGeom prst="roundRect">
-            <a:avLst/>
-          </a:prstGeom>
-          <a:solidFill>
-            <a:srgbClr val="FEF3C7"/>
-          </a:solidFill>
-          <a:ln>
-            <a:solidFill>
-              <a:srgbClr val="FEF3C7"/>
-            </a:solidFill>
-          </a:ln>
-        </p:spPr>
-        <p:style>
-          <a:lnRef idx="1">
-            <a:schemeClr val="accent1"/>
-          </a:lnRef>
-          <a:fillRef idx="3">
-            <a:schemeClr val="accent1"/>
-          </a:fillRef>
-          <a:effectRef idx="2">
-            <a:schemeClr val="accent1"/>
-          </a:effectRef>
-          <a:fontRef idx="minor">
-            <a:schemeClr val="lt1"/>
-          </a:fontRef>
-        </p:style>
-        <p:txBody>
-          <a:bodyPr wrap="square" lIns="38100" tIns="38100" rIns="38100" bIns="38100" rtlCol="0" anchor="ctr"/>
-          <a:lstStyle/>
-          <a:p>
-            <a:pPr algn="ctr">
-              <a:lnSpc>
-                <a:spcPct val="96000"/>
-              </a:lnSpc>
-            </a:pPr>
-            <a:endParaRPr/>
-          </a:p>
-        </p:txBody>
-      </p:sp>
-      <p:sp>
-        <p:nvSpPr>
-          <p:cNvPr id="17" name="TextBox 16"/>
-          <p:cNvSpPr txBox="1"/>
-          <p:nvPr/>
-        </p:nvSpPr>
-        <p:spPr>
-          <a:xfrm>
-            <a:off x="8485632" y="1325880"/>
-            <a:ext cx="320040" cy="256032"/>
-          </a:xfrm>
-          <a:prstGeom prst="rect">
-            <a:avLst/>
-          </a:prstGeom>
-          <a:noFill/>
-        </p:spPr>
-        <p:txBody>
-          <a:bodyPr wrap="square" lIns="38100" tIns="38100" rIns="38100" bIns="38100" anchor="ctr">
-            <a:spAutoFit/>
-          </a:bodyPr>
-          <a:lstStyle/>
-          <a:p>
-            <a:pPr algn="ctr">
-              <a:lnSpc>
-                <a:spcPct val="96000"/>
-              </a:lnSpc>
-            </a:pPr>
-            <a:r>
-              <a:rPr sz="2500" b="1">
-                <a:solidFill>
-                  <a:srgbClr val="B45309"/>
-                </a:solidFill>
-                <a:latin typeface="Aptos"/>
-              </a:rPr>
-              <a:t>3</a:t>
-            </a:r>
-          </a:p>
-        </p:txBody>
-      </p:sp>
-      <p:sp>
-        <p:nvSpPr>
-          <p:cNvPr id="18" name="TextBox 17"/>
-          <p:cNvSpPr txBox="1"/>
-          <p:nvPr/>
-        </p:nvSpPr>
-        <p:spPr>
-          <a:xfrm>
-            <a:off x="11018520" y="1298448"/>
-            <a:ext cx="411480" cy="320040"/>
-          </a:xfrm>
-          <a:prstGeom prst="rect">
-            <a:avLst/>
-          </a:prstGeom>
-          <a:noFill/>
-        </p:spPr>
-        <p:txBody>
-          <a:bodyPr wrap="square" lIns="38100" tIns="38100" rIns="38100" bIns="38100" anchor="ctr">
-            <a:spAutoFit/>
-          </a:bodyPr>
-          <a:lstStyle/>
-          <a:p>
-            <a:pPr algn="ctr">
-              <a:lnSpc>
-                <a:spcPct val="96000"/>
-              </a:lnSpc>
-            </a:pPr>
-            <a:r>
-              <a:rPr sz="2500" b="0">
-                <a:solidFill>
-                  <a:srgbClr val="111827"/>
-                </a:solidFill>
-                <a:latin typeface="Aptos"/>
-              </a:rPr>
-              <a:t>✅</a:t>
-            </a:r>
-          </a:p>
-        </p:txBody>
-      </p:sp>
-      <p:sp>
-        <p:nvSpPr>
-          <p:cNvPr id="19" name="TextBox 18"/>
-          <p:cNvSpPr txBox="1"/>
-          <p:nvPr/>
-        </p:nvSpPr>
-        <p:spPr>
-          <a:xfrm>
-            <a:off x="8851392" y="1280160"/>
-            <a:ext cx="2057400" cy="228600"/>
-          </a:xfrm>
-          <a:prstGeom prst="rect">
-            <a:avLst/>
-          </a:prstGeom>
-          <a:noFill/>
-        </p:spPr>
-        <p:txBody>
-          <a:bodyPr wrap="square" lIns="38100" tIns="38100" rIns="38100" bIns="38100" anchor="ctr">
-            <a:spAutoFit/>
-          </a:bodyPr>
-          <a:lstStyle/>
-          <a:p>
-            <a:pPr algn="l">
-              <a:lnSpc>
-                <a:spcPct val="96000"/>
-              </a:lnSpc>
-            </a:pPr>
-            <a:r>
-              <a:rPr sz="1830" b="1">
-                <a:solidFill>
-                  <a:srgbClr val="B45309"/>
-                </a:solidFill>
-                <a:latin typeface="Aptos"/>
-              </a:rPr>
-              <a:t>Verify</a:t>
-            </a:r>
-          </a:p>
-        </p:txBody>
-      </p:sp>
-      <p:sp>
-        <p:nvSpPr>
-          <p:cNvPr id="20" name="TextBox 19"/>
-          <p:cNvSpPr txBox="1"/>
-          <p:nvPr/>
-        </p:nvSpPr>
-        <p:spPr>
-          <a:xfrm>
-            <a:off x="8851392" y="1645920"/>
-            <a:ext cx="2468880" cy="411480"/>
-          </a:xfrm>
-          <a:prstGeom prst="rect">
-            <a:avLst/>
-          </a:prstGeom>
-          <a:noFill/>
-        </p:spPr>
-        <p:txBody>
-          <a:bodyPr wrap="square" lIns="38100" tIns="38100" rIns="38100" bIns="38100" anchor="t">
-            <a:spAutoFit/>
-          </a:bodyPr>
-          <a:lstStyle/>
-          <a:p>
-            <a:pPr algn="l">
-              <a:lnSpc>
-                <a:spcPct val="96000"/>
-              </a:lnSpc>
-            </a:pPr>
-            <a:r>
-              <a:rPr sz="1520" b="0">
-                <a:solidFill>
-                  <a:srgbClr val="111827"/>
-                </a:solidFill>
-                <a:latin typeface="Aptos"/>
-              </a:rPr>
-              <a:t>Open Terminal in VS Code and check Python works.</a:t>
-            </a:r>
-          </a:p>
-        </p:txBody>
-      </p:sp>
-      <p:sp>
-        <p:nvSpPr>
-          <p:cNvPr id="21" name="Rounded Rectangle 20"/>
-          <p:cNvSpPr/>
-          <p:nvPr/>
-        </p:nvSpPr>
-        <p:spPr>
-          <a:xfrm>
-            <a:off x="624841" y="3141460"/>
-            <a:ext cx="5166360" cy="1417320"/>
-          </a:xfrm>
-          <a:prstGeom prst="roundRect">
-            <a:avLst/>
+            <a:avLst>
+              <a:gd name="adj" fmla="val 8276"/>
+            </a:avLst>
           </a:prstGeom>
           <a:solidFill>
             <a:srgbClr val="0F172A"/>
           </a:solidFill>
-          <a:ln>
+          <a:ln w="12700">
             <a:solidFill>
-              <a:srgbClr val="0F172A"/>
+              <a:srgbClr val="334155">
+                <a:alpha val="90000"/>
+              </a:srgbClr>
             </a:solidFill>
+            <a:prstDash val="solid"/>
           </a:ln>
-        </p:spPr>
-        <p:style>
-          <a:lnRef idx="1">
-            <a:schemeClr val="accent1"/>
-          </a:lnRef>
-          <a:fillRef idx="3">
-            <a:schemeClr val="accent1"/>
-          </a:fillRef>
-          <a:effectRef idx="2">
-            <a:schemeClr val="accent1"/>
-          </a:effectRef>
-          <a:fontRef idx="minor">
-            <a:schemeClr val="lt1"/>
-          </a:fontRef>
-        </p:style>
-        <p:txBody>
-          <a:bodyPr wrap="square" lIns="38100" tIns="38100" rIns="38100" bIns="38100" rtlCol="0" anchor="ctr"/>
-          <a:lstStyle/>
-          <a:p>
-            <a:pPr algn="ctr">
-              <a:lnSpc>
-                <a:spcPct val="96000"/>
-              </a:lnSpc>
-            </a:pPr>
-            <a:endParaRPr/>
-          </a:p>
-        </p:txBody>
-      </p:sp>
-      <p:sp>
-        <p:nvSpPr>
-          <p:cNvPr id="22" name="TextBox 21"/>
-          <p:cNvSpPr txBox="1"/>
-          <p:nvPr/>
-        </p:nvSpPr>
-        <p:spPr>
-          <a:xfrm>
-            <a:off x="762001" y="3269476"/>
-            <a:ext cx="4892040" cy="1188720"/>
-          </a:xfrm>
-          <a:prstGeom prst="rect">
-            <a:avLst/>
-          </a:prstGeom>
-          <a:noFill/>
-        </p:spPr>
-        <p:txBody>
-          <a:bodyPr wrap="square" lIns="25400" tIns="25400" rIns="25400" bIns="25400" anchor="t">
-            <a:spAutoFit/>
-          </a:bodyPr>
-          <a:lstStyle/>
-          <a:p>
-            <a:pPr algn="l">
-              <a:lnSpc>
-                <a:spcPct val="86000"/>
-              </a:lnSpc>
-            </a:pPr>
-            <a:r>
-              <a:rPr sz="1800" b="0" dirty="0" err="1">
-                <a:solidFill>
-                  <a:srgbClr val="F8FAFC"/>
-                </a:solidFill>
-                <a:latin typeface="Cascadia Mono"/>
-              </a:rPr>
-              <a:t>py</a:t>
-            </a:r>
-            <a:r>
-              <a:rPr sz="1800" b="0" dirty="0">
-                <a:solidFill>
-                  <a:srgbClr val="F8FAFC"/>
-                </a:solidFill>
-                <a:latin typeface="Cascadia Mono"/>
-              </a:rPr>
-              <a:t> --version
-python --version
-</a:t>
-            </a:r>
-            <a:r>
-              <a:rPr sz="1800" b="0" dirty="0" err="1">
-                <a:solidFill>
-                  <a:srgbClr val="F8FAFC"/>
-                </a:solidFill>
-                <a:latin typeface="Cascadia Mono"/>
-              </a:rPr>
-              <a:t>py</a:t>
-            </a:r>
-            <a:r>
-              <a:rPr sz="1800" b="0" dirty="0">
-                <a:solidFill>
-                  <a:srgbClr val="F8FAFC"/>
-                </a:solidFill>
-                <a:latin typeface="Cascadia Mono"/>
-              </a:rPr>
-              <a:t> -m pip install notebook pandas matplotlib</a:t>
-            </a:r>
-          </a:p>
-        </p:txBody>
-      </p:sp>
-      <p:sp>
-        <p:nvSpPr>
-          <p:cNvPr id="23" name="Rounded Rectangle 22"/>
-          <p:cNvSpPr/>
-          <p:nvPr/>
-        </p:nvSpPr>
-        <p:spPr>
-          <a:xfrm>
-            <a:off x="6400800" y="3273552"/>
-            <a:ext cx="4937760" cy="1417320"/>
-          </a:xfrm>
-          <a:prstGeom prst="roundRect">
-            <a:avLst/>
-          </a:prstGeom>
-          <a:solidFill>
-            <a:srgbClr val="FFFFFF"/>
-          </a:solidFill>
-          <a:ln>
-            <a:solidFill>
-              <a:srgbClr val="FFFFFF"/>
-            </a:solidFill>
-          </a:ln>
-        </p:spPr>
-        <p:style>
-          <a:lnRef idx="1">
-            <a:schemeClr val="accent1"/>
-          </a:lnRef>
-          <a:fillRef idx="3">
-            <a:schemeClr val="accent1"/>
-          </a:fillRef>
-          <a:effectRef idx="2">
-            <a:schemeClr val="accent1"/>
-          </a:effectRef>
-          <a:fontRef idx="minor">
-            <a:schemeClr val="lt1"/>
-          </a:fontRef>
-        </p:style>
-        <p:txBody>
-          <a:bodyPr wrap="square" lIns="38100" tIns="38100" rIns="38100" bIns="38100" rtlCol="0" anchor="ctr"/>
-          <a:lstStyle/>
-          <a:p>
-            <a:pPr algn="ctr">
-              <a:lnSpc>
-                <a:spcPct val="96000"/>
-              </a:lnSpc>
-            </a:pPr>
-            <a:endParaRPr/>
-          </a:p>
-        </p:txBody>
-      </p:sp>
-      <p:sp>
-        <p:nvSpPr>
-          <p:cNvPr id="24" name="TextBox 23"/>
-          <p:cNvSpPr txBox="1"/>
-          <p:nvPr/>
-        </p:nvSpPr>
-        <p:spPr>
-          <a:xfrm>
-            <a:off x="6629400" y="3493008"/>
-            <a:ext cx="2834640" cy="228600"/>
-          </a:xfrm>
-          <a:prstGeom prst="rect">
-            <a:avLst/>
-          </a:prstGeom>
-          <a:noFill/>
-        </p:spPr>
-        <p:txBody>
-          <a:bodyPr wrap="square" lIns="38100" tIns="38100" rIns="38100" bIns="38100" anchor="ctr">
-            <a:spAutoFit/>
-          </a:bodyPr>
-          <a:lstStyle/>
-          <a:p>
-            <a:pPr algn="l">
-              <a:lnSpc>
-                <a:spcPct val="96000"/>
-              </a:lnSpc>
-            </a:pPr>
-            <a:r>
-              <a:rPr sz="2000" b="1">
-                <a:solidFill>
-                  <a:srgbClr val="B91C1C"/>
-                </a:solidFill>
-                <a:latin typeface="Aptos"/>
-              </a:rPr>
-              <a:t>Windows PATH reminder</a:t>
-            </a:r>
-          </a:p>
-        </p:txBody>
-      </p:sp>
-      <p:sp>
-        <p:nvSpPr>
-          <p:cNvPr id="25" name="TextBox 24"/>
-          <p:cNvSpPr txBox="1"/>
-          <p:nvPr/>
-        </p:nvSpPr>
-        <p:spPr>
-          <a:xfrm>
-            <a:off x="6629400" y="3858768"/>
-            <a:ext cx="4389120" cy="411480"/>
-          </a:xfrm>
-          <a:prstGeom prst="rect">
-            <a:avLst/>
-          </a:prstGeom>
-          <a:noFill/>
-        </p:spPr>
-        <p:txBody>
-          <a:bodyPr wrap="square" lIns="38100" tIns="38100" rIns="38100" bIns="38100" anchor="t">
-            <a:spAutoFit/>
-          </a:bodyPr>
-          <a:lstStyle/>
-          <a:p>
-            <a:pPr algn="l">
-              <a:lnSpc>
-                <a:spcPct val="96000"/>
-              </a:lnSpc>
-            </a:pPr>
-            <a:r>
-              <a:rPr sz="1680" b="0" dirty="0">
-                <a:solidFill>
-                  <a:srgbClr val="111827"/>
-                </a:solidFill>
-                <a:latin typeface="Aptos"/>
-              </a:rPr>
-              <a:t>If Python is not found, check PATH or use the Python launcher command: </a:t>
-            </a:r>
-            <a:r>
-              <a:rPr sz="1680" b="0" dirty="0" err="1">
-                <a:solidFill>
-                  <a:srgbClr val="111827"/>
-                </a:solidFill>
-                <a:latin typeface="Aptos"/>
-              </a:rPr>
-              <a:t>py</a:t>
-            </a:r>
-            <a:endParaRPr sz="1680" b="0" dirty="0">
-              <a:solidFill>
-                <a:srgbClr val="111827"/>
-              </a:solidFill>
-              <a:latin typeface="Aptos"/>
-            </a:endParaRPr>
-          </a:p>
-        </p:txBody>
-      </p:sp>
-      <p:sp>
-        <p:nvSpPr>
-          <p:cNvPr id="26" name="Rounded Rectangle 25"/>
-          <p:cNvSpPr/>
-          <p:nvPr/>
-        </p:nvSpPr>
-        <p:spPr>
-          <a:xfrm>
-            <a:off x="1325880" y="5230368"/>
-            <a:ext cx="9555480" cy="747738"/>
-          </a:xfrm>
-          <a:prstGeom prst="roundRect">
-            <a:avLst/>
-          </a:prstGeom>
-          <a:solidFill>
-            <a:srgbClr val="0F172A"/>
-          </a:solidFill>
-          <a:ln>
-            <a:solidFill>
-              <a:srgbClr val="0F172A"/>
-            </a:solidFill>
-          </a:ln>
-        </p:spPr>
-        <p:style>
-          <a:lnRef idx="1">
-            <a:schemeClr val="accent1"/>
-          </a:lnRef>
-          <a:fillRef idx="3">
-            <a:schemeClr val="accent1"/>
-          </a:fillRef>
-          <a:effectRef idx="2">
-            <a:schemeClr val="accent1"/>
-          </a:effectRef>
-          <a:fontRef idx="minor">
-            <a:schemeClr val="lt1"/>
-          </a:fontRef>
-        </p:style>
-        <p:txBody>
-          <a:bodyPr wrap="square" lIns="38100" tIns="38100" rIns="38100" bIns="38100" rtlCol="0" anchor="ctr"/>
-          <a:lstStyle/>
-          <a:p>
-            <a:pPr algn="ctr">
-              <a:lnSpc>
-                <a:spcPct val="96000"/>
-              </a:lnSpc>
-            </a:pPr>
-            <a:endParaRPr/>
-          </a:p>
-        </p:txBody>
-      </p:sp>
-      <p:sp>
-        <p:nvSpPr>
-          <p:cNvPr id="27" name="TextBox 26"/>
-          <p:cNvSpPr txBox="1"/>
-          <p:nvPr/>
-        </p:nvSpPr>
-        <p:spPr>
-          <a:xfrm>
-            <a:off x="1463039" y="5358383"/>
-            <a:ext cx="9281159" cy="365760"/>
-          </a:xfrm>
-          <a:prstGeom prst="rect">
-            <a:avLst/>
-          </a:prstGeom>
-          <a:noFill/>
-        </p:spPr>
-        <p:txBody>
-          <a:bodyPr wrap="square" lIns="38100" tIns="38100" rIns="38100" bIns="38100" anchor="t">
-            <a:spAutoFit/>
-          </a:bodyPr>
-          <a:lstStyle/>
-          <a:p>
-            <a:pPr algn="l">
-              <a:lnSpc>
-                <a:spcPct val="96000"/>
-              </a:lnSpc>
-            </a:pPr>
-            <a:r>
-              <a:rPr sz="1520" b="0">
-                <a:solidFill>
-                  <a:srgbClr val="F8FAFC"/>
-                </a:solidFill>
-                <a:latin typeface="Cascadia Mono"/>
-              </a:rPr>
-              <a:t>C:\Users\&lt;YourName&gt;\AppData\Local\Programs\Python\Python311
-C:\Users\&lt;YourName&gt;\AppData\Local\Programs\Python\Python311\Scripts</a:t>
-            </a:r>
-          </a:p>
-        </p:txBody>
-      </p:sp>
-      <p:sp>
-        <p:nvSpPr>
-          <p:cNvPr id="29" name="TextBox 28">
+          <a:effectLst>
+            <a:outerShdw blurRad="25400" dist="12700" dir="2700000" algn="bl" rotWithShape="0">
+              <a:srgbClr val="000000">
+                <a:alpha val="16000"/>
+              </a:srgbClr>
+            </a:outerShdw>
+          </a:effectLst>
+        </p:spPr>
+        <p:txBody>
+          <a:bodyPr/>
+          <a:lstStyle/>
+          <a:p>
+            <a:endParaRPr lang="en-US"/>
+          </a:p>
+        </p:txBody>
+      </p:sp>
+      <p:sp>
+        <p:nvSpPr>
+          <p:cNvPr id="15" name="Text 13"/>
+          <p:cNvSpPr/>
+          <p:nvPr/>
+        </p:nvSpPr>
+        <p:spPr>
+          <a:xfrm>
+            <a:off x="7920143" y="4473853"/>
+            <a:ext cx="3691299" cy="971076"/>
+          </a:xfrm>
+          <a:prstGeom prst="rect">
+            <a:avLst/>
+          </a:prstGeom>
+          <a:noFill/>
+          <a:ln/>
+        </p:spPr>
+        <p:txBody>
+          <a:bodyPr wrap="square" lIns="0" tIns="0" rIns="0" bIns="0" rtlCol="0" anchor="ctr"/>
+          <a:lstStyle/>
+          <a:p>
+            <a:pPr marL="0" indent="0">
+              <a:buNone/>
+            </a:pPr>
+            <a:r>
+              <a:rPr lang="en-US" sz="1200" dirty="0">
+                <a:solidFill>
+                  <a:srgbClr val="E5E7EB"/>
+                </a:solidFill>
+                <a:latin typeface="DejaVu Sans Mono" pitchFamily="34" charset="0"/>
+                <a:ea typeface="DejaVu Sans Mono" pitchFamily="34" charset="-122"/>
+                <a:cs typeface="DejaVu Sans Mono" pitchFamily="34" charset="-120"/>
+              </a:rPr>
+              <a:t>py --version</a:t>
+            </a:r>
+            <a:endParaRPr lang="en-US" sz="1200" dirty="0"/>
+          </a:p>
+          <a:p>
+            <a:pPr marL="0" indent="0">
+              <a:buNone/>
+            </a:pPr>
+            <a:r>
+              <a:rPr lang="en-US" sz="1200" dirty="0">
+                <a:solidFill>
+                  <a:srgbClr val="E5E7EB"/>
+                </a:solidFill>
+                <a:latin typeface="DejaVu Sans Mono" pitchFamily="34" charset="0"/>
+                <a:ea typeface="DejaVu Sans Mono" pitchFamily="34" charset="-122"/>
+                <a:cs typeface="DejaVu Sans Mono" pitchFamily="34" charset="-120"/>
+              </a:rPr>
+              <a:t>python --version</a:t>
+            </a:r>
+            <a:endParaRPr lang="en-US" sz="1200" dirty="0"/>
+          </a:p>
+          <a:p>
+            <a:pPr marL="0" indent="0">
+              <a:buNone/>
+            </a:pPr>
+            <a:endParaRPr lang="en-US" sz="1200" dirty="0"/>
+          </a:p>
+          <a:p>
+            <a:pPr marL="0" indent="0">
+              <a:buNone/>
+            </a:pPr>
+            <a:r>
+              <a:rPr lang="en-US" sz="1200" dirty="0">
+                <a:solidFill>
+                  <a:srgbClr val="E5E7EB"/>
+                </a:solidFill>
+                <a:latin typeface="DejaVu Sans Mono" pitchFamily="34" charset="0"/>
+                <a:ea typeface="DejaVu Sans Mono" pitchFamily="34" charset="-122"/>
+                <a:cs typeface="DejaVu Sans Mono" pitchFamily="34" charset="-120"/>
+              </a:rPr>
+              <a:t>py -m pip install notebook pandas matplotlib</a:t>
+            </a:r>
+            <a:endParaRPr lang="en-US" sz="1200" dirty="0"/>
+          </a:p>
+        </p:txBody>
+      </p:sp>
+      <p:sp>
+        <p:nvSpPr>
+          <p:cNvPr id="16" name="Text 14"/>
+          <p:cNvSpPr/>
+          <p:nvPr/>
+        </p:nvSpPr>
+        <p:spPr>
+          <a:xfrm>
+            <a:off x="7845553" y="5335244"/>
+            <a:ext cx="5183326" cy="292608"/>
+          </a:xfrm>
+          <a:prstGeom prst="rect">
+            <a:avLst/>
+          </a:prstGeom>
+          <a:noFill/>
+          <a:ln/>
+        </p:spPr>
+        <p:txBody>
+          <a:bodyPr wrap="square" lIns="0" tIns="0" rIns="0" bIns="0" rtlCol="0" anchor="ctr"/>
+          <a:lstStyle/>
+          <a:p>
+            <a:pPr marL="0" indent="0">
+              <a:buNone/>
+            </a:pPr>
+            <a:r>
+              <a:rPr lang="en-US" sz="1400" dirty="0">
+                <a:solidFill>
+                  <a:srgbClr val="4B5563"/>
+                </a:solidFill>
+              </a:rPr>
+              <a:t>use py on Windows; python3 is common on Mac/Linux.</a:t>
+            </a:r>
+            <a:endParaRPr lang="en-US" sz="1400" dirty="0"/>
+          </a:p>
+        </p:txBody>
+      </p:sp>
+      <p:pic>
+        <p:nvPicPr>
+          <p:cNvPr id="18" name="Picture 17">
             <a:extLst>
               <a:ext uri="{FF2B5EF4-FFF2-40B4-BE49-F238E27FC236}">
-                <a16:creationId xmlns:a16="http://schemas.microsoft.com/office/drawing/2014/main" id="{BC84F7F1-9F9D-66AB-A11F-9ADF9023D9B7}"/>
+                <a16:creationId xmlns:a16="http://schemas.microsoft.com/office/drawing/2014/main" id="{5CB11237-1398-5358-44FB-865A0B12982E}"/>
+              </a:ext>
+            </a:extLst>
+          </p:cNvPr>
+          <p:cNvPicPr>
+            <a:picLocks noChangeAspect="1"/>
+          </p:cNvPicPr>
+          <p:nvPr/>
+        </p:nvPicPr>
+        <p:blipFill>
+          <a:blip r:embed="rId3"/>
+          <a:stretch>
+            <a:fillRect/>
+          </a:stretch>
+        </p:blipFill>
+        <p:spPr>
+          <a:xfrm>
+            <a:off x="736930" y="3246378"/>
+            <a:ext cx="5939915" cy="3549072"/>
+          </a:xfrm>
+          <a:prstGeom prst="rect">
+            <a:avLst/>
+          </a:prstGeom>
+        </p:spPr>
+      </p:pic>
+      <p:pic>
+        <p:nvPicPr>
+          <p:cNvPr id="20" name="Picture 19">
+            <a:extLst>
+              <a:ext uri="{FF2B5EF4-FFF2-40B4-BE49-F238E27FC236}">
+                <a16:creationId xmlns:a16="http://schemas.microsoft.com/office/drawing/2014/main" id="{D80A16CA-5D32-08A6-BC05-310E3B7BB7D2}"/>
+              </a:ext>
+            </a:extLst>
+          </p:cNvPr>
+          <p:cNvPicPr>
+            <a:picLocks noChangeAspect="1"/>
+          </p:cNvPicPr>
+          <p:nvPr/>
+        </p:nvPicPr>
+        <p:blipFill>
+          <a:blip r:embed="rId4"/>
+          <a:stretch>
+            <a:fillRect/>
+          </a:stretch>
+        </p:blipFill>
+        <p:spPr>
+          <a:xfrm>
+            <a:off x="6839615" y="5916889"/>
+            <a:ext cx="4615455" cy="878561"/>
+          </a:xfrm>
+          <a:prstGeom prst="rect">
+            <a:avLst/>
+          </a:prstGeom>
+        </p:spPr>
+      </p:pic>
+      <p:sp>
+        <p:nvSpPr>
+          <p:cNvPr id="22" name="TextBox 21">
+            <a:extLst>
+              <a:ext uri="{FF2B5EF4-FFF2-40B4-BE49-F238E27FC236}">
+                <a16:creationId xmlns:a16="http://schemas.microsoft.com/office/drawing/2014/main" id="{0CA635B6-5879-6D6D-F3B6-7CBC719AD2E6}"/>
               </a:ext>
             </a:extLst>
           </p:cNvPr>
@@ -30768,20 +30463,73 @@
         </p:nvSpPr>
         <p:spPr>
           <a:xfrm>
-            <a:off x="5010912" y="2224033"/>
-            <a:ext cx="2468880" cy="697499"/>
-          </a:xfrm>
-          <a:prstGeom prst="rect">
-            <a:avLst/>
-          </a:prstGeom>
-          <a:noFill/>
-        </p:spPr>
-        <p:txBody>
-          <a:bodyPr wrap="square" lIns="38100" tIns="38100" rIns="38100" bIns="38100" anchor="t">
+            <a:off x="736930" y="2783589"/>
+            <a:ext cx="6512942" cy="430887"/>
+          </a:xfrm>
+          <a:prstGeom prst="rect">
+            <a:avLst/>
+          </a:prstGeom>
+          <a:noFill/>
+        </p:spPr>
+        <p:txBody>
+          <a:bodyPr wrap="square">
             <a:spAutoFit/>
           </a:bodyPr>
           <a:lstStyle/>
           <a:p>
+            <a:pPr>
+              <a:buNone/>
+            </a:pPr>
+            <a:r>
+              <a:rPr lang="en-US" sz="1050" dirty="0">
+                <a:latin typeface="Courier New" panose="02070309020205020404" pitchFamily="49" charset="0"/>
+              </a:rPr>
+              <a:t>C:\Users\&lt;YourName&gt;\AppData\Local\Programs\Python\Python311</a:t>
+            </a:r>
+            <a:endParaRPr lang="en-US" sz="1050" dirty="0"/>
+          </a:p>
+          <a:p>
+            <a:pPr>
+              <a:buNone/>
+            </a:pPr>
+            <a:r>
+              <a:rPr lang="en-US" sz="1050" dirty="0">
+                <a:latin typeface="Courier New" panose="02070309020205020404" pitchFamily="49" charset="0"/>
+              </a:rPr>
+              <a:t>C:\Users\&lt;YourName&gt;\AppData\Local\Programs\Python\Python311\Scripts</a:t>
+            </a:r>
+            <a:endParaRPr lang="en-US" sz="1050" dirty="0"/>
+          </a:p>
+        </p:txBody>
+      </p:sp>
+      <p:sp>
+        <p:nvSpPr>
+          <p:cNvPr id="19" name="TextBox 18">
+            <a:extLst>
+              <a:ext uri="{FF2B5EF4-FFF2-40B4-BE49-F238E27FC236}">
+                <a16:creationId xmlns:a16="http://schemas.microsoft.com/office/drawing/2014/main" id="{48F72B34-7D5A-5DEF-7C1D-267016142B55}"/>
+              </a:ext>
+            </a:extLst>
+          </p:cNvPr>
+          <p:cNvSpPr txBox="1"/>
+          <p:nvPr/>
+        </p:nvSpPr>
+        <p:spPr>
+          <a:xfrm>
+            <a:off x="8010144" y="2070250"/>
+            <a:ext cx="3213339" cy="712887"/>
+          </a:xfrm>
+          <a:prstGeom prst="rect">
+            <a:avLst/>
+          </a:prstGeom>
+          <a:noFill/>
+        </p:spPr>
+        <p:txBody>
+          <a:bodyPr wrap="square">
+            <a:spAutoFit/>
+          </a:bodyPr>
+          <a:lstStyle/>
+          <a:p>
             <a:pPr algn="l">
               <a:lnSpc>
                 <a:spcPct val="96000"/>
@@ -30837,12 +30585,141 @@
               </a:rPr>
               <a:t>Comment: Ctrl + /</a:t>
             </a:r>
-            <a:endParaRPr sz="1400" b="0" dirty="0">
-              <a:solidFill>
-                <a:srgbClr val="111827"/>
-              </a:solidFill>
-              <a:latin typeface="Abadi ExtraLight" panose="020F0502020204030204" pitchFamily="34" charset="0"/>
-            </a:endParaRPr>
+          </a:p>
+        </p:txBody>
+      </p:sp>
+      <p:sp>
+        <p:nvSpPr>
+          <p:cNvPr id="23" name="TextBox 22">
+            <a:extLst>
+              <a:ext uri="{FF2B5EF4-FFF2-40B4-BE49-F238E27FC236}">
+                <a16:creationId xmlns:a16="http://schemas.microsoft.com/office/drawing/2014/main" id="{569D4601-CDCF-78E1-188A-0F65268AB4F4}"/>
+              </a:ext>
+            </a:extLst>
+          </p:cNvPr>
+          <p:cNvSpPr txBox="1"/>
+          <p:nvPr/>
+        </p:nvSpPr>
+        <p:spPr>
+          <a:xfrm>
+            <a:off x="5890260" y="1409383"/>
+            <a:ext cx="411480" cy="320040"/>
+          </a:xfrm>
+          <a:prstGeom prst="rect">
+            <a:avLst/>
+          </a:prstGeom>
+          <a:noFill/>
+        </p:spPr>
+        <p:txBody>
+          <a:bodyPr wrap="square" lIns="38100" tIns="38100" rIns="38100" bIns="38100" anchor="ctr">
+            <a:spAutoFit/>
+          </a:bodyPr>
+          <a:lstStyle/>
+          <a:p>
+            <a:pPr algn="ctr">
+              <a:lnSpc>
+                <a:spcPct val="96000"/>
+              </a:lnSpc>
+            </a:pPr>
+            <a:r>
+              <a:rPr sz="2500" b="0" dirty="0">
+                <a:solidFill>
+                  <a:srgbClr val="111827"/>
+                </a:solidFill>
+                <a:latin typeface="Aptos"/>
+              </a:rPr>
+              <a:t>🐍</a:t>
+            </a:r>
+          </a:p>
+        </p:txBody>
+      </p:sp>
+      <p:sp>
+        <p:nvSpPr>
+          <p:cNvPr id="25" name="TextBox 24">
+            <a:extLst>
+              <a:ext uri="{FF2B5EF4-FFF2-40B4-BE49-F238E27FC236}">
+                <a16:creationId xmlns:a16="http://schemas.microsoft.com/office/drawing/2014/main" id="{0CE978D4-E192-AE30-D6C6-CAEC4AB10673}"/>
+              </a:ext>
+            </a:extLst>
+          </p:cNvPr>
+          <p:cNvSpPr txBox="1"/>
+          <p:nvPr/>
+        </p:nvSpPr>
+        <p:spPr>
+          <a:xfrm>
+            <a:off x="10698480" y="874722"/>
+            <a:ext cx="411480" cy="320040"/>
+          </a:xfrm>
+          <a:prstGeom prst="rect">
+            <a:avLst/>
+          </a:prstGeom>
+          <a:noFill/>
+        </p:spPr>
+        <p:txBody>
+          <a:bodyPr wrap="square" lIns="38100" tIns="38100" rIns="38100" bIns="38100" anchor="ctr">
+            <a:spAutoFit/>
+          </a:bodyPr>
+          <a:lstStyle/>
+          <a:p>
+            <a:pPr algn="ctr">
+              <a:lnSpc>
+                <a:spcPct val="96000"/>
+              </a:lnSpc>
+            </a:pPr>
+            <a:r>
+              <a:rPr sz="2500" b="0" dirty="0">
+                <a:solidFill>
+                  <a:srgbClr val="111827"/>
+                </a:solidFill>
+                <a:latin typeface="Aptos"/>
+              </a:rPr>
+              <a:t>🧰</a:t>
+            </a:r>
+          </a:p>
+        </p:txBody>
+      </p:sp>
+      <p:sp>
+        <p:nvSpPr>
+          <p:cNvPr id="27" name="TextBox 26">
+            <a:extLst>
+              <a:ext uri="{FF2B5EF4-FFF2-40B4-BE49-F238E27FC236}">
+                <a16:creationId xmlns:a16="http://schemas.microsoft.com/office/drawing/2014/main" id="{69F8C5A1-6905-BD59-1B70-917A31D7AAFE}"/>
+              </a:ext>
+            </a:extLst>
+          </p:cNvPr>
+          <p:cNvSpPr txBox="1"/>
+          <p:nvPr/>
+        </p:nvSpPr>
+        <p:spPr>
+          <a:xfrm>
+            <a:off x="10863072" y="3237406"/>
+            <a:ext cx="411480" cy="320040"/>
+          </a:xfrm>
+          <a:prstGeom prst="rect">
+            <a:avLst/>
+          </a:prstGeom>
+          <a:noFill/>
+        </p:spPr>
+        <p:txBody>
+          <a:bodyPr wrap="square" lIns="38100" tIns="38100" rIns="38100" bIns="38100" anchor="ctr">
+            <a:spAutoFit/>
+          </a:bodyPr>
+          <a:lstStyle/>
+          <a:p>
+            <a:pPr algn="ctr">
+              <a:lnSpc>
+                <a:spcPct val="96000"/>
+              </a:lnSpc>
+            </a:pPr>
+            <a:r>
+              <a:rPr sz="2500" b="0" dirty="0">
+                <a:solidFill>
+                  <a:srgbClr val="111827"/>
+                </a:solidFill>
+                <a:latin typeface="Aptos"/>
+              </a:rPr>
+              <a:t>✅</a:t>
+            </a:r>
           </a:p>
         </p:txBody>
       </p:sp>
@@ -31536,16 +31413,106 @@
               </a:lnSpc>
             </a:pPr>
             <a:r>
-              <a:rPr sz="1800" b="0">
+              <a:rPr sz="1800" b="0" dirty="0">
                 <a:solidFill>
                   <a:srgbClr val="F8FAFC"/>
                 </a:solidFill>
                 <a:latin typeface="Cascadia Mono"/>
               </a:rPr>
-              <a:t>python -m venv .venv
-.venv\Scripts\activate
-py -m pip install notebook
-jupyter notebook</a:t>
+              <a:t>python -m </a:t>
+            </a:r>
+            <a:r>
+              <a:rPr sz="1800" b="0" dirty="0" err="1">
+                <a:solidFill>
+                  <a:srgbClr val="F8FAFC"/>
+                </a:solidFill>
+                <a:latin typeface="Cascadia Mono"/>
+              </a:rPr>
+              <a:t>venv</a:t>
+            </a:r>
+            <a:r>
+              <a:rPr sz="1800" b="0" dirty="0">
+                <a:solidFill>
+                  <a:srgbClr val="F8FAFC"/>
+                </a:solidFill>
+                <a:latin typeface="Cascadia Mono"/>
+              </a:rPr>
+              <a:t> .</a:t>
+            </a:r>
+            <a:r>
+              <a:rPr sz="1800" b="0" dirty="0" err="1">
+                <a:solidFill>
+                  <a:srgbClr val="F8FAFC"/>
+                </a:solidFill>
+                <a:latin typeface="Cascadia Mono"/>
+              </a:rPr>
+              <a:t>venv</a:t>
+            </a:r>
+            <a:r>
+              <a:rPr sz="1800" b="0" dirty="0">
+                <a:solidFill>
+                  <a:srgbClr val="F8FAFC"/>
+                </a:solidFill>
+                <a:latin typeface="Cascadia Mono"/>
+              </a:rPr>
+              <a:t>
+.</a:t>
+            </a:r>
+            <a:r>
+              <a:rPr sz="1800" b="0" dirty="0" err="1">
+                <a:solidFill>
+                  <a:srgbClr val="F8FAFC"/>
+                </a:solidFill>
+                <a:latin typeface="Cascadia Mono"/>
+              </a:rPr>
+              <a:t>venv</a:t>
+            </a:r>
+            <a:r>
+              <a:rPr sz="1800" b="0" dirty="0">
+                <a:solidFill>
+                  <a:srgbClr val="F8FAFC"/>
+                </a:solidFill>
+                <a:latin typeface="Cascadia Mono"/>
+              </a:rPr>
+              <a:t>\Scripts\activate
+</a:t>
+            </a:r>
+            <a:r>
+              <a:rPr sz="1800" b="0" dirty="0" err="1">
+                <a:solidFill>
+                  <a:srgbClr val="F8FAFC"/>
+                </a:solidFill>
+                <a:latin typeface="Cascadia Mono"/>
+              </a:rPr>
+              <a:t>py</a:t>
+            </a:r>
+            <a:r>
+              <a:rPr sz="1800" b="0" dirty="0">
+                <a:solidFill>
+                  <a:srgbClr val="F8FAFC"/>
+                </a:solidFill>
+                <a:latin typeface="Cascadia Mono"/>
+              </a:rPr>
+              <a:t> -m pip install notebook
+</a:t>
+            </a:r>
+            <a:r>
+              <a:rPr sz="1800" b="0" dirty="0" err="1">
+                <a:solidFill>
+                  <a:srgbClr val="F8FAFC"/>
+                </a:solidFill>
+                <a:latin typeface="Cascadia Mono"/>
+              </a:rPr>
+              <a:t>jupyter</a:t>
+            </a:r>
+            <a:r>
+              <a:rPr sz="1800" b="0" dirty="0">
+                <a:solidFill>
+                  <a:srgbClr val="F8FAFC"/>
+                </a:solidFill>
+                <a:latin typeface="Cascadia Mono"/>
+              </a:rPr>
+              <a:t> notebook</a:t>
             </a:r>
           </a:p>
         </p:txBody>
